--- a/assets/demo/reporte-ejecutivo/reporte.pptx
+++ b/assets/demo/reporte-ejecutivo/reporte.pptx
@@ -3847,7 +3847,7 @@
                 <a:ea typeface="Calibri" pitchFamily="34" charset="-122"/>
                 <a:cs typeface="Calibri" pitchFamily="34" charset="-120"/>
               </a:rPr>
-              <a:t>Las ventas de S/ 45,700,000 generaron margen bruto de NaN% y margen operativo de NaN%, mostrando una operación rentable.</a:t>
+              <a:t>Las ventas de S/ 45,700,000 generaron margen bruto de 16.4% y margen operativo de 4.6%, mostrando una operación rentable.</a:t>
             </a:r>
             <a:endParaRPr lang="en-US" sz="950" dirty="0"/>
           </a:p>
@@ -4996,7 +4996,7 @@
                           <a:ea typeface="Calibri" pitchFamily="34" charset="-122"/>
                           <a:cs typeface="Calibri" pitchFamily="34" charset="-120"/>
                         </a:rPr>
-                        <a:t>S/ -</a:t>
+                        <a:t>S/ 7,494,800</a:t>
                       </a:r>
                       <a:endParaRPr lang="en-US" sz="850" dirty="0">
                         <a:latin typeface="Calibri" charset="0"/>
@@ -5064,7 +5064,7 @@
                           <a:ea typeface="Calibri" pitchFamily="34" charset="-122"/>
                           <a:cs typeface="Calibri" pitchFamily="34" charset="-120"/>
                         </a:rPr>
-                        <a:t>NaN%</a:t>
+                        <a:t>16.4%</a:t>
                       </a:r>
                       <a:endParaRPr lang="en-US" sz="850" dirty="0">
                         <a:latin typeface="Calibri" charset="0"/>
@@ -5614,7 +5614,7 @@
                           <a:ea typeface="Calibri" pitchFamily="34" charset="-122"/>
                           <a:cs typeface="Calibri" pitchFamily="34" charset="-120"/>
                         </a:rPr>
-                        <a:t>S/ -</a:t>
+                        <a:t>S/ 2,106,800</a:t>
                       </a:r>
                       <a:endParaRPr lang="en-US" sz="850" dirty="0">
                         <a:latin typeface="Calibri" charset="0"/>
@@ -5682,7 +5682,7 @@
                           <a:ea typeface="Calibri" pitchFamily="34" charset="-122"/>
                           <a:cs typeface="Calibri" pitchFamily="34" charset="-120"/>
                         </a:rPr>
-                        <a:t>NaN%</a:t>
+                        <a:t>4.6%</a:t>
                       </a:r>
                       <a:endParaRPr lang="en-US" sz="850" dirty="0">
                         <a:latin typeface="Calibri" charset="0"/>
@@ -7159,7 +7159,7 @@
                 <a:ea typeface="Calibri" pitchFamily="34" charset="-122"/>
                 <a:cs typeface="Calibri" pitchFamily="34" charset="-120"/>
               </a:rPr>
-              <a:t>7.65xx</a:t>
+              <a:t>7.65x</a:t>
             </a:r>
             <a:endParaRPr lang="en-US" sz="1700" dirty="0"/>
           </a:p>
@@ -8882,6 +8882,624 @@
                           <a:ea typeface="Calibri" pitchFamily="34" charset="-122"/>
                           <a:cs typeface="Calibri" pitchFamily="34" charset="-120"/>
                         </a:rPr>
+                        <a:t>  CxC Comerciales</a:t>
+                      </a:r>
+                      <a:endParaRPr lang="en-US" sz="850" dirty="0">
+                        <a:latin typeface="Calibri" charset="0"/>
+                        <a:ea typeface="Calibri" charset="0"/>
+                        <a:cs typeface="Calibri" charset="0"/>
+                      </a:endParaRPr>
+                    </a:p>
+                  </a:txBody>
+                  <a:tcPr marL="91440" marR="91440" marT="45720" marB="45720">
+                    <a:lnL w="3810" cap="flat" cmpd="sng" algn="ctr">
+                      <a:solidFill>
+                        <a:srgbClr val="D0D0D0"/>
+                      </a:solidFill>
+                      <a:prstDash val="solid"/>
+                      <a:round/>
+                      <a:headEnd type="none" w="med" len="med"/>
+                      <a:tailEnd type="none" w="med" len="med"/>
+                    </a:lnL>
+                    <a:lnR w="3810" cap="flat" cmpd="sng" algn="ctr">
+                      <a:solidFill>
+                        <a:srgbClr val="D0D0D0"/>
+                      </a:solidFill>
+                      <a:prstDash val="solid"/>
+                      <a:round/>
+                      <a:headEnd type="none" w="med" len="med"/>
+                      <a:tailEnd type="none" w="med" len="med"/>
+                    </a:lnR>
+                    <a:lnT w="3810" cap="flat" cmpd="sng" algn="ctr">
+                      <a:solidFill>
+                        <a:srgbClr val="D0D0D0"/>
+                      </a:solidFill>
+                      <a:prstDash val="solid"/>
+                      <a:round/>
+                      <a:headEnd type="none" w="med" len="med"/>
+                      <a:tailEnd type="none" w="med" len="med"/>
+                    </a:lnT>
+                    <a:lnB w="3810" cap="flat" cmpd="sng" algn="ctr">
+                      <a:solidFill>
+                        <a:srgbClr val="D0D0D0"/>
+                      </a:solidFill>
+                      <a:prstDash val="solid"/>
+                      <a:round/>
+                      <a:headEnd type="none" w="med" len="med"/>
+                      <a:tailEnd type="none" w="med" len="med"/>
+                    </a:lnB>
+                    <a:solidFill>
+                      <a:srgbClr val="F8F9FA"/>
+                    </a:solidFill>
+                  </a:tcPr>
+                </a:tc>
+                <a:tc>
+                  <a:txBody>
+                    <a:bodyPr/>
+                    <a:lstStyle/>
+                    <a:p>
+                      <a:pPr algn="r" indent="0" marL="0">
+                        <a:buNone/>
+                      </a:pPr>
+                      <a:r>
+                        <a:rPr lang="en-US" sz="850" dirty="0">
+                          <a:solidFill>
+                            <a:srgbClr val="2D3748"/>
+                          </a:solidFill>
+                          <a:latin typeface="Calibri" pitchFamily="34" charset="0"/>
+                          <a:ea typeface="Calibri" pitchFamily="34" charset="-122"/>
+                          <a:cs typeface="Calibri" pitchFamily="34" charset="-120"/>
+                        </a:rPr>
+                        <a:t>S/ 5,780,000</a:t>
+                      </a:r>
+                      <a:endParaRPr lang="en-US" sz="850" dirty="0">
+                        <a:latin typeface="Calibri" charset="0"/>
+                        <a:ea typeface="Calibri" charset="0"/>
+                        <a:cs typeface="Calibri" charset="0"/>
+                      </a:endParaRPr>
+                    </a:p>
+                  </a:txBody>
+                  <a:tcPr marL="91440" marR="91440" marT="45720" marB="45720">
+                    <a:lnL w="3810" cap="flat" cmpd="sng" algn="ctr">
+                      <a:solidFill>
+                        <a:srgbClr val="D0D0D0"/>
+                      </a:solidFill>
+                      <a:prstDash val="solid"/>
+                      <a:round/>
+                      <a:headEnd type="none" w="med" len="med"/>
+                      <a:tailEnd type="none" w="med" len="med"/>
+                    </a:lnL>
+                    <a:lnR w="3810" cap="flat" cmpd="sng" algn="ctr">
+                      <a:solidFill>
+                        <a:srgbClr val="D0D0D0"/>
+                      </a:solidFill>
+                      <a:prstDash val="solid"/>
+                      <a:round/>
+                      <a:headEnd type="none" w="med" len="med"/>
+                      <a:tailEnd type="none" w="med" len="med"/>
+                    </a:lnR>
+                    <a:lnT w="3810" cap="flat" cmpd="sng" algn="ctr">
+                      <a:solidFill>
+                        <a:srgbClr val="D0D0D0"/>
+                      </a:solidFill>
+                      <a:prstDash val="solid"/>
+                      <a:round/>
+                      <a:headEnd type="none" w="med" len="med"/>
+                      <a:tailEnd type="none" w="med" len="med"/>
+                    </a:lnT>
+                    <a:lnB w="3810" cap="flat" cmpd="sng" algn="ctr">
+                      <a:solidFill>
+                        <a:srgbClr val="D0D0D0"/>
+                      </a:solidFill>
+                      <a:prstDash val="solid"/>
+                      <a:round/>
+                      <a:headEnd type="none" w="med" len="med"/>
+                      <a:tailEnd type="none" w="med" len="med"/>
+                    </a:lnB>
+                    <a:solidFill>
+                      <a:srgbClr val="F8F9FA"/>
+                    </a:solidFill>
+                  </a:tcPr>
+                </a:tc>
+                <a:tc>
+                  <a:txBody>
+                    <a:bodyPr/>
+                    <a:lstStyle/>
+                    <a:p>
+                      <a:pPr algn="r" indent="0" marL="0">
+                        <a:buNone/>
+                      </a:pPr>
+                      <a:r>
+                        <a:rPr lang="en-US" sz="850" dirty="0">
+                          <a:solidFill>
+                            <a:srgbClr val="2D3748"/>
+                          </a:solidFill>
+                          <a:latin typeface="Calibri" pitchFamily="34" charset="0"/>
+                          <a:ea typeface="Calibri" pitchFamily="34" charset="-122"/>
+                          <a:cs typeface="Calibri" pitchFamily="34" charset="-120"/>
+                        </a:rPr>
+                        <a:t>24.9%</a:t>
+                      </a:r>
+                      <a:endParaRPr lang="en-US" sz="850" dirty="0">
+                        <a:latin typeface="Calibri" charset="0"/>
+                        <a:ea typeface="Calibri" charset="0"/>
+                        <a:cs typeface="Calibri" charset="0"/>
+                      </a:endParaRPr>
+                    </a:p>
+                  </a:txBody>
+                  <a:tcPr marL="91440" marR="91440" marT="45720" marB="45720">
+                    <a:lnL w="3810" cap="flat" cmpd="sng" algn="ctr">
+                      <a:solidFill>
+                        <a:srgbClr val="D0D0D0"/>
+                      </a:solidFill>
+                      <a:prstDash val="solid"/>
+                      <a:round/>
+                      <a:headEnd type="none" w="med" len="med"/>
+                      <a:tailEnd type="none" w="med" len="med"/>
+                    </a:lnL>
+                    <a:lnR w="3810" cap="flat" cmpd="sng" algn="ctr">
+                      <a:solidFill>
+                        <a:srgbClr val="D0D0D0"/>
+                      </a:solidFill>
+                      <a:prstDash val="solid"/>
+                      <a:round/>
+                      <a:headEnd type="none" w="med" len="med"/>
+                      <a:tailEnd type="none" w="med" len="med"/>
+                    </a:lnR>
+                    <a:lnT w="3810" cap="flat" cmpd="sng" algn="ctr">
+                      <a:solidFill>
+                        <a:srgbClr val="D0D0D0"/>
+                      </a:solidFill>
+                      <a:prstDash val="solid"/>
+                      <a:round/>
+                      <a:headEnd type="none" w="med" len="med"/>
+                      <a:tailEnd type="none" w="med" len="med"/>
+                    </a:lnT>
+                    <a:lnB w="3810" cap="flat" cmpd="sng" algn="ctr">
+                      <a:solidFill>
+                        <a:srgbClr val="D0D0D0"/>
+                      </a:solidFill>
+                      <a:prstDash val="solid"/>
+                      <a:round/>
+                      <a:headEnd type="none" w="med" len="med"/>
+                      <a:tailEnd type="none" w="med" len="med"/>
+                    </a:lnB>
+                    <a:solidFill>
+                      <a:srgbClr val="F8F9FA"/>
+                    </a:solidFill>
+                  </a:tcPr>
+                </a:tc>
+              </a:tr>
+              <a:tr h="0">
+                <a:tc>
+                  <a:txBody>
+                    <a:bodyPr/>
+                    <a:lstStyle/>
+                    <a:p>
+                      <a:pPr algn="l" indent="0" marL="0">
+                        <a:buNone/>
+                      </a:pPr>
+                      <a:r>
+                        <a:rPr lang="en-US" sz="850" dirty="0">
+                          <a:solidFill>
+                            <a:srgbClr val="2D3748"/>
+                          </a:solidFill>
+                          <a:latin typeface="Calibri" pitchFamily="34" charset="0"/>
+                          <a:ea typeface="Calibri" pitchFamily="34" charset="-122"/>
+                          <a:cs typeface="Calibri" pitchFamily="34" charset="-120"/>
+                        </a:rPr>
+                        <a:t>  CxC Personal/Accionistas</a:t>
+                      </a:r>
+                      <a:endParaRPr lang="en-US" sz="850" dirty="0">
+                        <a:latin typeface="Calibri" charset="0"/>
+                        <a:ea typeface="Calibri" charset="0"/>
+                        <a:cs typeface="Calibri" charset="0"/>
+                      </a:endParaRPr>
+                    </a:p>
+                  </a:txBody>
+                  <a:tcPr marL="91440" marR="91440" marT="45720" marB="45720">
+                    <a:lnL w="3810" cap="flat" cmpd="sng" algn="ctr">
+                      <a:solidFill>
+                        <a:srgbClr val="D0D0D0"/>
+                      </a:solidFill>
+                      <a:prstDash val="solid"/>
+                      <a:round/>
+                      <a:headEnd type="none" w="med" len="med"/>
+                      <a:tailEnd type="none" w="med" len="med"/>
+                    </a:lnL>
+                    <a:lnR w="3810" cap="flat" cmpd="sng" algn="ctr">
+                      <a:solidFill>
+                        <a:srgbClr val="D0D0D0"/>
+                      </a:solidFill>
+                      <a:prstDash val="solid"/>
+                      <a:round/>
+                      <a:headEnd type="none" w="med" len="med"/>
+                      <a:tailEnd type="none" w="med" len="med"/>
+                    </a:lnR>
+                    <a:lnT w="3810" cap="flat" cmpd="sng" algn="ctr">
+                      <a:solidFill>
+                        <a:srgbClr val="D0D0D0"/>
+                      </a:solidFill>
+                      <a:prstDash val="solid"/>
+                      <a:round/>
+                      <a:headEnd type="none" w="med" len="med"/>
+                      <a:tailEnd type="none" w="med" len="med"/>
+                    </a:lnT>
+                    <a:lnB w="3810" cap="flat" cmpd="sng" algn="ctr">
+                      <a:solidFill>
+                        <a:srgbClr val="D0D0D0"/>
+                      </a:solidFill>
+                      <a:prstDash val="solid"/>
+                      <a:round/>
+                      <a:headEnd type="none" w="med" len="med"/>
+                      <a:tailEnd type="none" w="med" len="med"/>
+                    </a:lnB>
+                    <a:solidFill>
+                      <a:srgbClr val="FFFFFF"/>
+                    </a:solidFill>
+                  </a:tcPr>
+                </a:tc>
+                <a:tc>
+                  <a:txBody>
+                    <a:bodyPr/>
+                    <a:lstStyle/>
+                    <a:p>
+                      <a:pPr algn="r" indent="0" marL="0">
+                        <a:buNone/>
+                      </a:pPr>
+                      <a:r>
+                        <a:rPr lang="en-US" sz="850" dirty="0">
+                          <a:solidFill>
+                            <a:srgbClr val="2D3748"/>
+                          </a:solidFill>
+                          <a:latin typeface="Calibri" pitchFamily="34" charset="0"/>
+                          <a:ea typeface="Calibri" pitchFamily="34" charset="-122"/>
+                          <a:cs typeface="Calibri" pitchFamily="34" charset="-120"/>
+                        </a:rPr>
+                        <a:t>S/ 19,000</a:t>
+                      </a:r>
+                      <a:endParaRPr lang="en-US" sz="850" dirty="0">
+                        <a:latin typeface="Calibri" charset="0"/>
+                        <a:ea typeface="Calibri" charset="0"/>
+                        <a:cs typeface="Calibri" charset="0"/>
+                      </a:endParaRPr>
+                    </a:p>
+                  </a:txBody>
+                  <a:tcPr marL="91440" marR="91440" marT="45720" marB="45720">
+                    <a:lnL w="3810" cap="flat" cmpd="sng" algn="ctr">
+                      <a:solidFill>
+                        <a:srgbClr val="D0D0D0"/>
+                      </a:solidFill>
+                      <a:prstDash val="solid"/>
+                      <a:round/>
+                      <a:headEnd type="none" w="med" len="med"/>
+                      <a:tailEnd type="none" w="med" len="med"/>
+                    </a:lnL>
+                    <a:lnR w="3810" cap="flat" cmpd="sng" algn="ctr">
+                      <a:solidFill>
+                        <a:srgbClr val="D0D0D0"/>
+                      </a:solidFill>
+                      <a:prstDash val="solid"/>
+                      <a:round/>
+                      <a:headEnd type="none" w="med" len="med"/>
+                      <a:tailEnd type="none" w="med" len="med"/>
+                    </a:lnR>
+                    <a:lnT w="3810" cap="flat" cmpd="sng" algn="ctr">
+                      <a:solidFill>
+                        <a:srgbClr val="D0D0D0"/>
+                      </a:solidFill>
+                      <a:prstDash val="solid"/>
+                      <a:round/>
+                      <a:headEnd type="none" w="med" len="med"/>
+                      <a:tailEnd type="none" w="med" len="med"/>
+                    </a:lnT>
+                    <a:lnB w="3810" cap="flat" cmpd="sng" algn="ctr">
+                      <a:solidFill>
+                        <a:srgbClr val="D0D0D0"/>
+                      </a:solidFill>
+                      <a:prstDash val="solid"/>
+                      <a:round/>
+                      <a:headEnd type="none" w="med" len="med"/>
+                      <a:tailEnd type="none" w="med" len="med"/>
+                    </a:lnB>
+                    <a:solidFill>
+                      <a:srgbClr val="FFFFFF"/>
+                    </a:solidFill>
+                  </a:tcPr>
+                </a:tc>
+                <a:tc>
+                  <a:txBody>
+                    <a:bodyPr/>
+                    <a:lstStyle/>
+                    <a:p>
+                      <a:pPr algn="r" indent="0" marL="0">
+                        <a:buNone/>
+                      </a:pPr>
+                      <a:r>
+                        <a:rPr lang="en-US" sz="850" dirty="0">
+                          <a:solidFill>
+                            <a:srgbClr val="2D3748"/>
+                          </a:solidFill>
+                          <a:latin typeface="Calibri" pitchFamily="34" charset="0"/>
+                          <a:ea typeface="Calibri" pitchFamily="34" charset="-122"/>
+                          <a:cs typeface="Calibri" pitchFamily="34" charset="-120"/>
+                        </a:rPr>
+                        <a:t>0.1%</a:t>
+                      </a:r>
+                      <a:endParaRPr lang="en-US" sz="850" dirty="0">
+                        <a:latin typeface="Calibri" charset="0"/>
+                        <a:ea typeface="Calibri" charset="0"/>
+                        <a:cs typeface="Calibri" charset="0"/>
+                      </a:endParaRPr>
+                    </a:p>
+                  </a:txBody>
+                  <a:tcPr marL="91440" marR="91440" marT="45720" marB="45720">
+                    <a:lnL w="3810" cap="flat" cmpd="sng" algn="ctr">
+                      <a:solidFill>
+                        <a:srgbClr val="D0D0D0"/>
+                      </a:solidFill>
+                      <a:prstDash val="solid"/>
+                      <a:round/>
+                      <a:headEnd type="none" w="med" len="med"/>
+                      <a:tailEnd type="none" w="med" len="med"/>
+                    </a:lnL>
+                    <a:lnR w="3810" cap="flat" cmpd="sng" algn="ctr">
+                      <a:solidFill>
+                        <a:srgbClr val="D0D0D0"/>
+                      </a:solidFill>
+                      <a:prstDash val="solid"/>
+                      <a:round/>
+                      <a:headEnd type="none" w="med" len="med"/>
+                      <a:tailEnd type="none" w="med" len="med"/>
+                    </a:lnR>
+                    <a:lnT w="3810" cap="flat" cmpd="sng" algn="ctr">
+                      <a:solidFill>
+                        <a:srgbClr val="D0D0D0"/>
+                      </a:solidFill>
+                      <a:prstDash val="solid"/>
+                      <a:round/>
+                      <a:headEnd type="none" w="med" len="med"/>
+                      <a:tailEnd type="none" w="med" len="med"/>
+                    </a:lnT>
+                    <a:lnB w="3810" cap="flat" cmpd="sng" algn="ctr">
+                      <a:solidFill>
+                        <a:srgbClr val="D0D0D0"/>
+                      </a:solidFill>
+                      <a:prstDash val="solid"/>
+                      <a:round/>
+                      <a:headEnd type="none" w="med" len="med"/>
+                      <a:tailEnd type="none" w="med" len="med"/>
+                    </a:lnB>
+                    <a:solidFill>
+                      <a:srgbClr val="FFFFFF"/>
+                    </a:solidFill>
+                  </a:tcPr>
+                </a:tc>
+              </a:tr>
+              <a:tr h="0">
+                <a:tc>
+                  <a:txBody>
+                    <a:bodyPr/>
+                    <a:lstStyle/>
+                    <a:p>
+                      <a:pPr algn="l" indent="0" marL="0">
+                        <a:buNone/>
+                      </a:pPr>
+                      <a:r>
+                        <a:rPr lang="en-US" sz="850" dirty="0">
+                          <a:solidFill>
+                            <a:srgbClr val="2D3748"/>
+                          </a:solidFill>
+                          <a:latin typeface="Calibri" pitchFamily="34" charset="0"/>
+                          <a:ea typeface="Calibri" pitchFamily="34" charset="-122"/>
+                          <a:cs typeface="Calibri" pitchFamily="34" charset="-120"/>
+                        </a:rPr>
+                        <a:t>  CxC Diversas</a:t>
+                      </a:r>
+                      <a:endParaRPr lang="en-US" sz="850" dirty="0">
+                        <a:latin typeface="Calibri" charset="0"/>
+                        <a:ea typeface="Calibri" charset="0"/>
+                        <a:cs typeface="Calibri" charset="0"/>
+                      </a:endParaRPr>
+                    </a:p>
+                  </a:txBody>
+                  <a:tcPr marL="91440" marR="91440" marT="45720" marB="45720">
+                    <a:lnL w="3810" cap="flat" cmpd="sng" algn="ctr">
+                      <a:solidFill>
+                        <a:srgbClr val="D0D0D0"/>
+                      </a:solidFill>
+                      <a:prstDash val="solid"/>
+                      <a:round/>
+                      <a:headEnd type="none" w="med" len="med"/>
+                      <a:tailEnd type="none" w="med" len="med"/>
+                    </a:lnL>
+                    <a:lnR w="3810" cap="flat" cmpd="sng" algn="ctr">
+                      <a:solidFill>
+                        <a:srgbClr val="D0D0D0"/>
+                      </a:solidFill>
+                      <a:prstDash val="solid"/>
+                      <a:round/>
+                      <a:headEnd type="none" w="med" len="med"/>
+                      <a:tailEnd type="none" w="med" len="med"/>
+                    </a:lnR>
+                    <a:lnT w="3810" cap="flat" cmpd="sng" algn="ctr">
+                      <a:solidFill>
+                        <a:srgbClr val="D0D0D0"/>
+                      </a:solidFill>
+                      <a:prstDash val="solid"/>
+                      <a:round/>
+                      <a:headEnd type="none" w="med" len="med"/>
+                      <a:tailEnd type="none" w="med" len="med"/>
+                    </a:lnT>
+                    <a:lnB w="3810" cap="flat" cmpd="sng" algn="ctr">
+                      <a:solidFill>
+                        <a:srgbClr val="D0D0D0"/>
+                      </a:solidFill>
+                      <a:prstDash val="solid"/>
+                      <a:round/>
+                      <a:headEnd type="none" w="med" len="med"/>
+                      <a:tailEnd type="none" w="med" len="med"/>
+                    </a:lnB>
+                    <a:solidFill>
+                      <a:srgbClr val="F8F9FA"/>
+                    </a:solidFill>
+                  </a:tcPr>
+                </a:tc>
+                <a:tc>
+                  <a:txBody>
+                    <a:bodyPr/>
+                    <a:lstStyle/>
+                    <a:p>
+                      <a:pPr algn="r" indent="0" marL="0">
+                        <a:buNone/>
+                      </a:pPr>
+                      <a:r>
+                        <a:rPr lang="en-US" sz="850" dirty="0">
+                          <a:solidFill>
+                            <a:srgbClr val="2D3748"/>
+                          </a:solidFill>
+                          <a:latin typeface="Calibri" pitchFamily="34" charset="0"/>
+                          <a:ea typeface="Calibri" pitchFamily="34" charset="-122"/>
+                          <a:cs typeface="Calibri" pitchFamily="34" charset="-120"/>
+                        </a:rPr>
+                        <a:t>S/ 1,395,000</a:t>
+                      </a:r>
+                      <a:endParaRPr lang="en-US" sz="850" dirty="0">
+                        <a:latin typeface="Calibri" charset="0"/>
+                        <a:ea typeface="Calibri" charset="0"/>
+                        <a:cs typeface="Calibri" charset="0"/>
+                      </a:endParaRPr>
+                    </a:p>
+                  </a:txBody>
+                  <a:tcPr marL="91440" marR="91440" marT="45720" marB="45720">
+                    <a:lnL w="3810" cap="flat" cmpd="sng" algn="ctr">
+                      <a:solidFill>
+                        <a:srgbClr val="D0D0D0"/>
+                      </a:solidFill>
+                      <a:prstDash val="solid"/>
+                      <a:round/>
+                      <a:headEnd type="none" w="med" len="med"/>
+                      <a:tailEnd type="none" w="med" len="med"/>
+                    </a:lnL>
+                    <a:lnR w="3810" cap="flat" cmpd="sng" algn="ctr">
+                      <a:solidFill>
+                        <a:srgbClr val="D0D0D0"/>
+                      </a:solidFill>
+                      <a:prstDash val="solid"/>
+                      <a:round/>
+                      <a:headEnd type="none" w="med" len="med"/>
+                      <a:tailEnd type="none" w="med" len="med"/>
+                    </a:lnR>
+                    <a:lnT w="3810" cap="flat" cmpd="sng" algn="ctr">
+                      <a:solidFill>
+                        <a:srgbClr val="D0D0D0"/>
+                      </a:solidFill>
+                      <a:prstDash val="solid"/>
+                      <a:round/>
+                      <a:headEnd type="none" w="med" len="med"/>
+                      <a:tailEnd type="none" w="med" len="med"/>
+                    </a:lnT>
+                    <a:lnB w="3810" cap="flat" cmpd="sng" algn="ctr">
+                      <a:solidFill>
+                        <a:srgbClr val="D0D0D0"/>
+                      </a:solidFill>
+                      <a:prstDash val="solid"/>
+                      <a:round/>
+                      <a:headEnd type="none" w="med" len="med"/>
+                      <a:tailEnd type="none" w="med" len="med"/>
+                    </a:lnB>
+                    <a:solidFill>
+                      <a:srgbClr val="F8F9FA"/>
+                    </a:solidFill>
+                  </a:tcPr>
+                </a:tc>
+                <a:tc>
+                  <a:txBody>
+                    <a:bodyPr/>
+                    <a:lstStyle/>
+                    <a:p>
+                      <a:pPr algn="r" indent="0" marL="0">
+                        <a:buNone/>
+                      </a:pPr>
+                      <a:r>
+                        <a:rPr lang="en-US" sz="850" dirty="0">
+                          <a:solidFill>
+                            <a:srgbClr val="2D3748"/>
+                          </a:solidFill>
+                          <a:latin typeface="Calibri" pitchFamily="34" charset="0"/>
+                          <a:ea typeface="Calibri" pitchFamily="34" charset="-122"/>
+                          <a:cs typeface="Calibri" pitchFamily="34" charset="-120"/>
+                        </a:rPr>
+                        <a:t>6.0%</a:t>
+                      </a:r>
+                      <a:endParaRPr lang="en-US" sz="850" dirty="0">
+                        <a:latin typeface="Calibri" charset="0"/>
+                        <a:ea typeface="Calibri" charset="0"/>
+                        <a:cs typeface="Calibri" charset="0"/>
+                      </a:endParaRPr>
+                    </a:p>
+                  </a:txBody>
+                  <a:tcPr marL="91440" marR="91440" marT="45720" marB="45720">
+                    <a:lnL w="3810" cap="flat" cmpd="sng" algn="ctr">
+                      <a:solidFill>
+                        <a:srgbClr val="D0D0D0"/>
+                      </a:solidFill>
+                      <a:prstDash val="solid"/>
+                      <a:round/>
+                      <a:headEnd type="none" w="med" len="med"/>
+                      <a:tailEnd type="none" w="med" len="med"/>
+                    </a:lnL>
+                    <a:lnR w="3810" cap="flat" cmpd="sng" algn="ctr">
+                      <a:solidFill>
+                        <a:srgbClr val="D0D0D0"/>
+                      </a:solidFill>
+                      <a:prstDash val="solid"/>
+                      <a:round/>
+                      <a:headEnd type="none" w="med" len="med"/>
+                      <a:tailEnd type="none" w="med" len="med"/>
+                    </a:lnR>
+                    <a:lnT w="3810" cap="flat" cmpd="sng" algn="ctr">
+                      <a:solidFill>
+                        <a:srgbClr val="D0D0D0"/>
+                      </a:solidFill>
+                      <a:prstDash val="solid"/>
+                      <a:round/>
+                      <a:headEnd type="none" w="med" len="med"/>
+                      <a:tailEnd type="none" w="med" len="med"/>
+                    </a:lnT>
+                    <a:lnB w="3810" cap="flat" cmpd="sng" algn="ctr">
+                      <a:solidFill>
+                        <a:srgbClr val="D0D0D0"/>
+                      </a:solidFill>
+                      <a:prstDash val="solid"/>
+                      <a:round/>
+                      <a:headEnd type="none" w="med" len="med"/>
+                      <a:tailEnd type="none" w="med" len="med"/>
+                    </a:lnB>
+                    <a:solidFill>
+                      <a:srgbClr val="F8F9FA"/>
+                    </a:solidFill>
+                  </a:tcPr>
+                </a:tc>
+              </a:tr>
+              <a:tr h="0">
+                <a:tc>
+                  <a:txBody>
+                    <a:bodyPr/>
+                    <a:lstStyle/>
+                    <a:p>
+                      <a:pPr algn="l" indent="0" marL="0">
+                        <a:buNone/>
+                      </a:pPr>
+                      <a:r>
+                        <a:rPr lang="en-US" sz="850" dirty="0">
+                          <a:solidFill>
+                            <a:srgbClr val="2D3748"/>
+                          </a:solidFill>
+                          <a:latin typeface="Calibri" pitchFamily="34" charset="0"/>
+                          <a:ea typeface="Calibri" pitchFamily="34" charset="-122"/>
+                          <a:cs typeface="Calibri" pitchFamily="34" charset="-120"/>
+                        </a:rPr>
                         <a:t>  Gastos Anticipados</a:t>
                       </a:r>
                       <a:endParaRPr lang="en-US" sz="850" dirty="0">
@@ -8929,7 +9547,7 @@
                       <a:tailEnd type="none" w="med" len="med"/>
                     </a:lnB>
                     <a:solidFill>
-                      <a:srgbClr val="F8F9FA"/>
+                      <a:srgbClr val="FFFFFF"/>
                     </a:solidFill>
                   </a:tcPr>
                 </a:tc>
@@ -8997,6 +9615,144 @@
                       <a:tailEnd type="none" w="med" len="med"/>
                     </a:lnB>
                     <a:solidFill>
+                      <a:srgbClr val="FFFFFF"/>
+                    </a:solidFill>
+                  </a:tcPr>
+                </a:tc>
+                <a:tc>
+                  <a:txBody>
+                    <a:bodyPr/>
+                    <a:lstStyle/>
+                    <a:p>
+                      <a:pPr algn="r" indent="0" marL="0">
+                        <a:buNone/>
+                      </a:pPr>
+                      <a:r>
+                        <a:rPr lang="en-US" sz="850" dirty="0">
+                          <a:solidFill>
+                            <a:srgbClr val="2D3748"/>
+                          </a:solidFill>
+                          <a:latin typeface="Calibri" pitchFamily="34" charset="0"/>
+                          <a:ea typeface="Calibri" pitchFamily="34" charset="-122"/>
+                          <a:cs typeface="Calibri" pitchFamily="34" charset="-120"/>
+                        </a:rPr>
+                        <a:t>0.6%</a:t>
+                      </a:r>
+                      <a:endParaRPr lang="en-US" sz="850" dirty="0">
+                        <a:latin typeface="Calibri" charset="0"/>
+                        <a:ea typeface="Calibri" charset="0"/>
+                        <a:cs typeface="Calibri" charset="0"/>
+                      </a:endParaRPr>
+                    </a:p>
+                  </a:txBody>
+                  <a:tcPr marL="91440" marR="91440" marT="45720" marB="45720">
+                    <a:lnL w="3810" cap="flat" cmpd="sng" algn="ctr">
+                      <a:solidFill>
+                        <a:srgbClr val="D0D0D0"/>
+                      </a:solidFill>
+                      <a:prstDash val="solid"/>
+                      <a:round/>
+                      <a:headEnd type="none" w="med" len="med"/>
+                      <a:tailEnd type="none" w="med" len="med"/>
+                    </a:lnL>
+                    <a:lnR w="3810" cap="flat" cmpd="sng" algn="ctr">
+                      <a:solidFill>
+                        <a:srgbClr val="D0D0D0"/>
+                      </a:solidFill>
+                      <a:prstDash val="solid"/>
+                      <a:round/>
+                      <a:headEnd type="none" w="med" len="med"/>
+                      <a:tailEnd type="none" w="med" len="med"/>
+                    </a:lnR>
+                    <a:lnT w="3810" cap="flat" cmpd="sng" algn="ctr">
+                      <a:solidFill>
+                        <a:srgbClr val="D0D0D0"/>
+                      </a:solidFill>
+                      <a:prstDash val="solid"/>
+                      <a:round/>
+                      <a:headEnd type="none" w="med" len="med"/>
+                      <a:tailEnd type="none" w="med" len="med"/>
+                    </a:lnT>
+                    <a:lnB w="3810" cap="flat" cmpd="sng" algn="ctr">
+                      <a:solidFill>
+                        <a:srgbClr val="D0D0D0"/>
+                      </a:solidFill>
+                      <a:prstDash val="solid"/>
+                      <a:round/>
+                      <a:headEnd type="none" w="med" len="med"/>
+                      <a:tailEnd type="none" w="med" len="med"/>
+                    </a:lnB>
+                    <a:solidFill>
+                      <a:srgbClr val="FFFFFF"/>
+                    </a:solidFill>
+                  </a:tcPr>
+                </a:tc>
+              </a:tr>
+              <a:tr h="0">
+                <a:tc>
+                  <a:txBody>
+                    <a:bodyPr/>
+                    <a:lstStyle/>
+                    <a:p>
+                      <a:pPr algn="l" indent="0" marL="0">
+                        <a:buNone/>
+                      </a:pPr>
+                      <a:r>
+                        <a:rPr lang="en-US" sz="850" dirty="0">
+                          <a:solidFill>
+                            <a:srgbClr val="2D3748"/>
+                          </a:solidFill>
+                          <a:latin typeface="Calibri" pitchFamily="34" charset="0"/>
+                          <a:ea typeface="Calibri" pitchFamily="34" charset="-122"/>
+                          <a:cs typeface="Calibri" pitchFamily="34" charset="-120"/>
+                        </a:rPr>
+                        <a:t>  Mercaderías</a:t>
+                      </a:r>
+                      <a:endParaRPr lang="en-US" sz="850" dirty="0">
+                        <a:latin typeface="Calibri" charset="0"/>
+                        <a:ea typeface="Calibri" charset="0"/>
+                        <a:cs typeface="Calibri" charset="0"/>
+                      </a:endParaRPr>
+                    </a:p>
+                  </a:txBody>
+                  <a:tcPr marL="91440" marR="91440" marT="45720" marB="45720">
+                    <a:lnL w="3810" cap="flat" cmpd="sng" algn="ctr">
+                      <a:solidFill>
+                        <a:srgbClr val="D0D0D0"/>
+                      </a:solidFill>
+                      <a:prstDash val="solid"/>
+                      <a:round/>
+                      <a:headEnd type="none" w="med" len="med"/>
+                      <a:tailEnd type="none" w="med" len="med"/>
+                    </a:lnL>
+                    <a:lnR w="3810" cap="flat" cmpd="sng" algn="ctr">
+                      <a:solidFill>
+                        <a:srgbClr val="D0D0D0"/>
+                      </a:solidFill>
+                      <a:prstDash val="solid"/>
+                      <a:round/>
+                      <a:headEnd type="none" w="med" len="med"/>
+                      <a:tailEnd type="none" w="med" len="med"/>
+                    </a:lnR>
+                    <a:lnT w="3810" cap="flat" cmpd="sng" algn="ctr">
+                      <a:solidFill>
+                        <a:srgbClr val="D0D0D0"/>
+                      </a:solidFill>
+                      <a:prstDash val="solid"/>
+                      <a:round/>
+                      <a:headEnd type="none" w="med" len="med"/>
+                      <a:tailEnd type="none" w="med" len="med"/>
+                    </a:lnT>
+                    <a:lnB w="3810" cap="flat" cmpd="sng" algn="ctr">
+                      <a:solidFill>
+                        <a:srgbClr val="D0D0D0"/>
+                      </a:solidFill>
+                      <a:prstDash val="solid"/>
+                      <a:round/>
+                      <a:headEnd type="none" w="med" len="med"/>
+                      <a:tailEnd type="none" w="med" len="med"/>
+                    </a:lnB>
+                    <a:solidFill>
                       <a:srgbClr val="F8F9FA"/>
                     </a:solidFill>
                   </a:tcPr>
@@ -9018,7 +9774,75 @@
                           <a:ea typeface="Calibri" pitchFamily="34" charset="-122"/>
                           <a:cs typeface="Calibri" pitchFamily="34" charset="-120"/>
                         </a:rPr>
-                        <a:t>0.6%</a:t>
+                        <a:t>S/ 4,995,000</a:t>
+                      </a:r>
+                      <a:endParaRPr lang="en-US" sz="850" dirty="0">
+                        <a:latin typeface="Calibri" charset="0"/>
+                        <a:ea typeface="Calibri" charset="0"/>
+                        <a:cs typeface="Calibri" charset="0"/>
+                      </a:endParaRPr>
+                    </a:p>
+                  </a:txBody>
+                  <a:tcPr marL="91440" marR="91440" marT="45720" marB="45720">
+                    <a:lnL w="3810" cap="flat" cmpd="sng" algn="ctr">
+                      <a:solidFill>
+                        <a:srgbClr val="D0D0D0"/>
+                      </a:solidFill>
+                      <a:prstDash val="solid"/>
+                      <a:round/>
+                      <a:headEnd type="none" w="med" len="med"/>
+                      <a:tailEnd type="none" w="med" len="med"/>
+                    </a:lnL>
+                    <a:lnR w="3810" cap="flat" cmpd="sng" algn="ctr">
+                      <a:solidFill>
+                        <a:srgbClr val="D0D0D0"/>
+                      </a:solidFill>
+                      <a:prstDash val="solid"/>
+                      <a:round/>
+                      <a:headEnd type="none" w="med" len="med"/>
+                      <a:tailEnd type="none" w="med" len="med"/>
+                    </a:lnR>
+                    <a:lnT w="3810" cap="flat" cmpd="sng" algn="ctr">
+                      <a:solidFill>
+                        <a:srgbClr val="D0D0D0"/>
+                      </a:solidFill>
+                      <a:prstDash val="solid"/>
+                      <a:round/>
+                      <a:headEnd type="none" w="med" len="med"/>
+                      <a:tailEnd type="none" w="med" len="med"/>
+                    </a:lnT>
+                    <a:lnB w="3810" cap="flat" cmpd="sng" algn="ctr">
+                      <a:solidFill>
+                        <a:srgbClr val="D0D0D0"/>
+                      </a:solidFill>
+                      <a:prstDash val="solid"/>
+                      <a:round/>
+                      <a:headEnd type="none" w="med" len="med"/>
+                      <a:tailEnd type="none" w="med" len="med"/>
+                    </a:lnB>
+                    <a:solidFill>
+                      <a:srgbClr val="F8F9FA"/>
+                    </a:solidFill>
+                  </a:tcPr>
+                </a:tc>
+                <a:tc>
+                  <a:txBody>
+                    <a:bodyPr/>
+                    <a:lstStyle/>
+                    <a:p>
+                      <a:pPr algn="r" indent="0" marL="0">
+                        <a:buNone/>
+                      </a:pPr>
+                      <a:r>
+                        <a:rPr lang="en-US" sz="850" dirty="0">
+                          <a:solidFill>
+                            <a:srgbClr val="2D3748"/>
+                          </a:solidFill>
+                          <a:latin typeface="Calibri" pitchFamily="34" charset="0"/>
+                          <a:ea typeface="Calibri" pitchFamily="34" charset="-122"/>
+                          <a:cs typeface="Calibri" pitchFamily="34" charset="-120"/>
+                        </a:rPr>
+                        <a:t>21.5%</a:t>
                       </a:r>
                       <a:endParaRPr lang="en-US" sz="850" dirty="0">
                         <a:latin typeface="Calibri" charset="0"/>
@@ -9478,6 +10302,212 @@
                           <a:ea typeface="Calibri" pitchFamily="34" charset="-122"/>
                           <a:cs typeface="Calibri" pitchFamily="34" charset="-120"/>
                         </a:rPr>
+                        <a:t>  IME Bruto</a:t>
+                      </a:r>
+                      <a:endParaRPr lang="en-US" sz="850" dirty="0">
+                        <a:latin typeface="Calibri" charset="0"/>
+                        <a:ea typeface="Calibri" charset="0"/>
+                        <a:cs typeface="Calibri" charset="0"/>
+                      </a:endParaRPr>
+                    </a:p>
+                  </a:txBody>
+                  <a:tcPr marL="91440" marR="91440" marT="45720" marB="45720">
+                    <a:lnL w="3810" cap="flat" cmpd="sng" algn="ctr">
+                      <a:solidFill>
+                        <a:srgbClr val="D0D0D0"/>
+                      </a:solidFill>
+                      <a:prstDash val="solid"/>
+                      <a:round/>
+                      <a:headEnd type="none" w="med" len="med"/>
+                      <a:tailEnd type="none" w="med" len="med"/>
+                    </a:lnL>
+                    <a:lnR w="3810" cap="flat" cmpd="sng" algn="ctr">
+                      <a:solidFill>
+                        <a:srgbClr val="D0D0D0"/>
+                      </a:solidFill>
+                      <a:prstDash val="solid"/>
+                      <a:round/>
+                      <a:headEnd type="none" w="med" len="med"/>
+                      <a:tailEnd type="none" w="med" len="med"/>
+                    </a:lnR>
+                    <a:lnT w="3810" cap="flat" cmpd="sng" algn="ctr">
+                      <a:solidFill>
+                        <a:srgbClr val="D0D0D0"/>
+                      </a:solidFill>
+                      <a:prstDash val="solid"/>
+                      <a:round/>
+                      <a:headEnd type="none" w="med" len="med"/>
+                      <a:tailEnd type="none" w="med" len="med"/>
+                    </a:lnT>
+                    <a:lnB w="3810" cap="flat" cmpd="sng" algn="ctr">
+                      <a:solidFill>
+                        <a:srgbClr val="D0D0D0"/>
+                      </a:solidFill>
+                      <a:prstDash val="solid"/>
+                      <a:round/>
+                      <a:headEnd type="none" w="med" len="med"/>
+                      <a:tailEnd type="none" w="med" len="med"/>
+                    </a:lnB>
+                    <a:solidFill>
+                      <a:srgbClr val="FFFFFF"/>
+                    </a:solidFill>
+                  </a:tcPr>
+                </a:tc>
+                <a:tc>
+                  <a:txBody>
+                    <a:bodyPr/>
+                    <a:lstStyle/>
+                    <a:p>
+                      <a:pPr algn="r" indent="0" marL="0">
+                        <a:buNone/>
+                      </a:pPr>
+                      <a:r>
+                        <a:rPr lang="en-US" sz="850" dirty="0">
+                          <a:solidFill>
+                            <a:srgbClr val="2D3748"/>
+                          </a:solidFill>
+                          <a:latin typeface="Calibri" pitchFamily="34" charset="0"/>
+                          <a:ea typeface="Calibri" pitchFamily="34" charset="-122"/>
+                          <a:cs typeface="Calibri" pitchFamily="34" charset="-120"/>
+                        </a:rPr>
+                        <a:t>S/ 7,410,000</a:t>
+                      </a:r>
+                      <a:endParaRPr lang="en-US" sz="850" dirty="0">
+                        <a:latin typeface="Calibri" charset="0"/>
+                        <a:ea typeface="Calibri" charset="0"/>
+                        <a:cs typeface="Calibri" charset="0"/>
+                      </a:endParaRPr>
+                    </a:p>
+                  </a:txBody>
+                  <a:tcPr marL="91440" marR="91440" marT="45720" marB="45720">
+                    <a:lnL w="3810" cap="flat" cmpd="sng" algn="ctr">
+                      <a:solidFill>
+                        <a:srgbClr val="D0D0D0"/>
+                      </a:solidFill>
+                      <a:prstDash val="solid"/>
+                      <a:round/>
+                      <a:headEnd type="none" w="med" len="med"/>
+                      <a:tailEnd type="none" w="med" len="med"/>
+                    </a:lnL>
+                    <a:lnR w="3810" cap="flat" cmpd="sng" algn="ctr">
+                      <a:solidFill>
+                        <a:srgbClr val="D0D0D0"/>
+                      </a:solidFill>
+                      <a:prstDash val="solid"/>
+                      <a:round/>
+                      <a:headEnd type="none" w="med" len="med"/>
+                      <a:tailEnd type="none" w="med" len="med"/>
+                    </a:lnR>
+                    <a:lnT w="3810" cap="flat" cmpd="sng" algn="ctr">
+                      <a:solidFill>
+                        <a:srgbClr val="D0D0D0"/>
+                      </a:solidFill>
+                      <a:prstDash val="solid"/>
+                      <a:round/>
+                      <a:headEnd type="none" w="med" len="med"/>
+                      <a:tailEnd type="none" w="med" len="med"/>
+                    </a:lnT>
+                    <a:lnB w="3810" cap="flat" cmpd="sng" algn="ctr">
+                      <a:solidFill>
+                        <a:srgbClr val="D0D0D0"/>
+                      </a:solidFill>
+                      <a:prstDash val="solid"/>
+                      <a:round/>
+                      <a:headEnd type="none" w="med" len="med"/>
+                      <a:tailEnd type="none" w="med" len="med"/>
+                    </a:lnB>
+                    <a:solidFill>
+                      <a:srgbClr val="FFFFFF"/>
+                    </a:solidFill>
+                  </a:tcPr>
+                </a:tc>
+                <a:tc>
+                  <a:txBody>
+                    <a:bodyPr/>
+                    <a:lstStyle/>
+                    <a:p>
+                      <a:pPr algn="r" indent="0" marL="0">
+                        <a:buNone/>
+                      </a:pPr>
+                      <a:r>
+                        <a:rPr lang="en-US" sz="850" dirty="0">
+                          <a:solidFill>
+                            <a:srgbClr val="2D3748"/>
+                          </a:solidFill>
+                          <a:latin typeface="Calibri" pitchFamily="34" charset="0"/>
+                          <a:ea typeface="Calibri" pitchFamily="34" charset="-122"/>
+                          <a:cs typeface="Calibri" pitchFamily="34" charset="-120"/>
+                        </a:rPr>
+                        <a:t>31.9%</a:t>
+                      </a:r>
+                      <a:endParaRPr lang="en-US" sz="850" dirty="0">
+                        <a:latin typeface="Calibri" charset="0"/>
+                        <a:ea typeface="Calibri" charset="0"/>
+                        <a:cs typeface="Calibri" charset="0"/>
+                      </a:endParaRPr>
+                    </a:p>
+                  </a:txBody>
+                  <a:tcPr marL="91440" marR="91440" marT="45720" marB="45720">
+                    <a:lnL w="3810" cap="flat" cmpd="sng" algn="ctr">
+                      <a:solidFill>
+                        <a:srgbClr val="D0D0D0"/>
+                      </a:solidFill>
+                      <a:prstDash val="solid"/>
+                      <a:round/>
+                      <a:headEnd type="none" w="med" len="med"/>
+                      <a:tailEnd type="none" w="med" len="med"/>
+                    </a:lnL>
+                    <a:lnR w="3810" cap="flat" cmpd="sng" algn="ctr">
+                      <a:solidFill>
+                        <a:srgbClr val="D0D0D0"/>
+                      </a:solidFill>
+                      <a:prstDash val="solid"/>
+                      <a:round/>
+                      <a:headEnd type="none" w="med" len="med"/>
+                      <a:tailEnd type="none" w="med" len="med"/>
+                    </a:lnR>
+                    <a:lnT w="3810" cap="flat" cmpd="sng" algn="ctr">
+                      <a:solidFill>
+                        <a:srgbClr val="D0D0D0"/>
+                      </a:solidFill>
+                      <a:prstDash val="solid"/>
+                      <a:round/>
+                      <a:headEnd type="none" w="med" len="med"/>
+                      <a:tailEnd type="none" w="med" len="med"/>
+                    </a:lnT>
+                    <a:lnB w="3810" cap="flat" cmpd="sng" algn="ctr">
+                      <a:solidFill>
+                        <a:srgbClr val="D0D0D0"/>
+                      </a:solidFill>
+                      <a:prstDash val="solid"/>
+                      <a:round/>
+                      <a:headEnd type="none" w="med" len="med"/>
+                      <a:tailEnd type="none" w="med" len="med"/>
+                    </a:lnB>
+                    <a:solidFill>
+                      <a:srgbClr val="FFFFFF"/>
+                    </a:solidFill>
+                  </a:tcPr>
+                </a:tc>
+              </a:tr>
+              <a:tr h="0">
+                <a:tc>
+                  <a:txBody>
+                    <a:bodyPr/>
+                    <a:lstStyle/>
+                    <a:p>
+                      <a:pPr algn="l" indent="0" marL="0">
+                        <a:buNone/>
+                      </a:pPr>
+                      <a:r>
+                        <a:rPr lang="en-US" sz="850" dirty="0">
+                          <a:solidFill>
+                            <a:srgbClr val="2D3748"/>
+                          </a:solidFill>
+                          <a:latin typeface="Calibri" pitchFamily="34" charset="0"/>
+                          <a:ea typeface="Calibri" pitchFamily="34" charset="-122"/>
+                          <a:cs typeface="Calibri" pitchFamily="34" charset="-120"/>
+                        </a:rPr>
                         <a:t>  Intangibles</a:t>
                       </a:r>
                       <a:endParaRPr lang="en-US" sz="850" dirty="0">
@@ -9525,7 +10555,7 @@
                       <a:tailEnd type="none" w="med" len="med"/>
                     </a:lnB>
                     <a:solidFill>
-                      <a:srgbClr val="FFFFFF"/>
+                      <a:srgbClr val="F8F9FA"/>
                     </a:solidFill>
                   </a:tcPr>
                 </a:tc>
@@ -9593,6 +10623,144 @@
                       <a:tailEnd type="none" w="med" len="med"/>
                     </a:lnB>
                     <a:solidFill>
+                      <a:srgbClr val="F8F9FA"/>
+                    </a:solidFill>
+                  </a:tcPr>
+                </a:tc>
+                <a:tc>
+                  <a:txBody>
+                    <a:bodyPr/>
+                    <a:lstStyle/>
+                    <a:p>
+                      <a:pPr algn="r" indent="0" marL="0">
+                        <a:buNone/>
+                      </a:pPr>
+                      <a:r>
+                        <a:rPr lang="en-US" sz="850" dirty="0">
+                          <a:solidFill>
+                            <a:srgbClr val="2D3748"/>
+                          </a:solidFill>
+                          <a:latin typeface="Calibri" pitchFamily="34" charset="0"/>
+                          <a:ea typeface="Calibri" pitchFamily="34" charset="-122"/>
+                          <a:cs typeface="Calibri" pitchFamily="34" charset="-120"/>
+                        </a:rPr>
+                        <a:t>1.1%</a:t>
+                      </a:r>
+                      <a:endParaRPr lang="en-US" sz="850" dirty="0">
+                        <a:latin typeface="Calibri" charset="0"/>
+                        <a:ea typeface="Calibri" charset="0"/>
+                        <a:cs typeface="Calibri" charset="0"/>
+                      </a:endParaRPr>
+                    </a:p>
+                  </a:txBody>
+                  <a:tcPr marL="91440" marR="91440" marT="45720" marB="45720">
+                    <a:lnL w="3810" cap="flat" cmpd="sng" algn="ctr">
+                      <a:solidFill>
+                        <a:srgbClr val="D0D0D0"/>
+                      </a:solidFill>
+                      <a:prstDash val="solid"/>
+                      <a:round/>
+                      <a:headEnd type="none" w="med" len="med"/>
+                      <a:tailEnd type="none" w="med" len="med"/>
+                    </a:lnL>
+                    <a:lnR w="3810" cap="flat" cmpd="sng" algn="ctr">
+                      <a:solidFill>
+                        <a:srgbClr val="D0D0D0"/>
+                      </a:solidFill>
+                      <a:prstDash val="solid"/>
+                      <a:round/>
+                      <a:headEnd type="none" w="med" len="med"/>
+                      <a:tailEnd type="none" w="med" len="med"/>
+                    </a:lnR>
+                    <a:lnT w="3810" cap="flat" cmpd="sng" algn="ctr">
+                      <a:solidFill>
+                        <a:srgbClr val="D0D0D0"/>
+                      </a:solidFill>
+                      <a:prstDash val="solid"/>
+                      <a:round/>
+                      <a:headEnd type="none" w="med" len="med"/>
+                      <a:tailEnd type="none" w="med" len="med"/>
+                    </a:lnT>
+                    <a:lnB w="3810" cap="flat" cmpd="sng" algn="ctr">
+                      <a:solidFill>
+                        <a:srgbClr val="D0D0D0"/>
+                      </a:solidFill>
+                      <a:prstDash val="solid"/>
+                      <a:round/>
+                      <a:headEnd type="none" w="med" len="med"/>
+                      <a:tailEnd type="none" w="med" len="med"/>
+                    </a:lnB>
+                    <a:solidFill>
+                      <a:srgbClr val="F8F9FA"/>
+                    </a:solidFill>
+                  </a:tcPr>
+                </a:tc>
+              </a:tr>
+              <a:tr h="0">
+                <a:tc>
+                  <a:txBody>
+                    <a:bodyPr/>
+                    <a:lstStyle/>
+                    <a:p>
+                      <a:pPr algn="l" indent="0" marL="0">
+                        <a:buNone/>
+                      </a:pPr>
+                      <a:r>
+                        <a:rPr lang="en-US" sz="850" dirty="0">
+                          <a:solidFill>
+                            <a:srgbClr val="2D3748"/>
+                          </a:solidFill>
+                          <a:latin typeface="Calibri" pitchFamily="34" charset="0"/>
+                          <a:ea typeface="Calibri" pitchFamily="34" charset="-122"/>
+                          <a:cs typeface="Calibri" pitchFamily="34" charset="-120"/>
+                        </a:rPr>
+                        <a:t>  Otras CxC No Corriente</a:t>
+                      </a:r>
+                      <a:endParaRPr lang="en-US" sz="850" dirty="0">
+                        <a:latin typeface="Calibri" charset="0"/>
+                        <a:ea typeface="Calibri" charset="0"/>
+                        <a:cs typeface="Calibri" charset="0"/>
+                      </a:endParaRPr>
+                    </a:p>
+                  </a:txBody>
+                  <a:tcPr marL="91440" marR="91440" marT="45720" marB="45720">
+                    <a:lnL w="3810" cap="flat" cmpd="sng" algn="ctr">
+                      <a:solidFill>
+                        <a:srgbClr val="D0D0D0"/>
+                      </a:solidFill>
+                      <a:prstDash val="solid"/>
+                      <a:round/>
+                      <a:headEnd type="none" w="med" len="med"/>
+                      <a:tailEnd type="none" w="med" len="med"/>
+                    </a:lnL>
+                    <a:lnR w="3810" cap="flat" cmpd="sng" algn="ctr">
+                      <a:solidFill>
+                        <a:srgbClr val="D0D0D0"/>
+                      </a:solidFill>
+                      <a:prstDash val="solid"/>
+                      <a:round/>
+                      <a:headEnd type="none" w="med" len="med"/>
+                      <a:tailEnd type="none" w="med" len="med"/>
+                    </a:lnR>
+                    <a:lnT w="3810" cap="flat" cmpd="sng" algn="ctr">
+                      <a:solidFill>
+                        <a:srgbClr val="D0D0D0"/>
+                      </a:solidFill>
+                      <a:prstDash val="solid"/>
+                      <a:round/>
+                      <a:headEnd type="none" w="med" len="med"/>
+                      <a:tailEnd type="none" w="med" len="med"/>
+                    </a:lnT>
+                    <a:lnB w="3810" cap="flat" cmpd="sng" algn="ctr">
+                      <a:solidFill>
+                        <a:srgbClr val="D0D0D0"/>
+                      </a:solidFill>
+                      <a:prstDash val="solid"/>
+                      <a:round/>
+                      <a:headEnd type="none" w="med" len="med"/>
+                      <a:tailEnd type="none" w="med" len="med"/>
+                    </a:lnB>
+                    <a:solidFill>
                       <a:srgbClr val="FFFFFF"/>
                     </a:solidFill>
                   </a:tcPr>
@@ -9614,7 +10782,75 @@
                           <a:ea typeface="Calibri" pitchFamily="34" charset="-122"/>
                           <a:cs typeface="Calibri" pitchFamily="34" charset="-120"/>
                         </a:rPr>
-                        <a:t>1.1%</a:t>
+                        <a:t>S/ 120,000</a:t>
+                      </a:r>
+                      <a:endParaRPr lang="en-US" sz="850" dirty="0">
+                        <a:latin typeface="Calibri" charset="0"/>
+                        <a:ea typeface="Calibri" charset="0"/>
+                        <a:cs typeface="Calibri" charset="0"/>
+                      </a:endParaRPr>
+                    </a:p>
+                  </a:txBody>
+                  <a:tcPr marL="91440" marR="91440" marT="45720" marB="45720">
+                    <a:lnL w="3810" cap="flat" cmpd="sng" algn="ctr">
+                      <a:solidFill>
+                        <a:srgbClr val="D0D0D0"/>
+                      </a:solidFill>
+                      <a:prstDash val="solid"/>
+                      <a:round/>
+                      <a:headEnd type="none" w="med" len="med"/>
+                      <a:tailEnd type="none" w="med" len="med"/>
+                    </a:lnL>
+                    <a:lnR w="3810" cap="flat" cmpd="sng" algn="ctr">
+                      <a:solidFill>
+                        <a:srgbClr val="D0D0D0"/>
+                      </a:solidFill>
+                      <a:prstDash val="solid"/>
+                      <a:round/>
+                      <a:headEnd type="none" w="med" len="med"/>
+                      <a:tailEnd type="none" w="med" len="med"/>
+                    </a:lnR>
+                    <a:lnT w="3810" cap="flat" cmpd="sng" algn="ctr">
+                      <a:solidFill>
+                        <a:srgbClr val="D0D0D0"/>
+                      </a:solidFill>
+                      <a:prstDash val="solid"/>
+                      <a:round/>
+                      <a:headEnd type="none" w="med" len="med"/>
+                      <a:tailEnd type="none" w="med" len="med"/>
+                    </a:lnT>
+                    <a:lnB w="3810" cap="flat" cmpd="sng" algn="ctr">
+                      <a:solidFill>
+                        <a:srgbClr val="D0D0D0"/>
+                      </a:solidFill>
+                      <a:prstDash val="solid"/>
+                      <a:round/>
+                      <a:headEnd type="none" w="med" len="med"/>
+                      <a:tailEnd type="none" w="med" len="med"/>
+                    </a:lnB>
+                    <a:solidFill>
+                      <a:srgbClr val="FFFFFF"/>
+                    </a:solidFill>
+                  </a:tcPr>
+                </a:tc>
+                <a:tc>
+                  <a:txBody>
+                    <a:bodyPr/>
+                    <a:lstStyle/>
+                    <a:p>
+                      <a:pPr algn="r" indent="0" marL="0">
+                        <a:buNone/>
+                      </a:pPr>
+                      <a:r>
+                        <a:rPr lang="en-US" sz="850" dirty="0">
+                          <a:solidFill>
+                            <a:srgbClr val="2D3748"/>
+                          </a:solidFill>
+                          <a:latin typeface="Calibri" pitchFamily="34" charset="0"/>
+                          <a:ea typeface="Calibri" pitchFamily="34" charset="-122"/>
+                          <a:cs typeface="Calibri" pitchFamily="34" charset="-120"/>
+                        </a:rPr>
+                        <a:t>0.5%</a:t>
                       </a:r>
                       <a:endParaRPr lang="en-US" sz="850" dirty="0">
                         <a:latin typeface="Calibri" charset="0"/>
@@ -10161,7 +11397,7 @@
                 <a:ea typeface="Calibri" pitchFamily="34" charset="-122"/>
                 <a:cs typeface="Calibri" pitchFamily="34" charset="-120"/>
               </a:rPr>
-              <a:t>CxC comerciales de 0 indica cobranza rápida (0 días).</a:t>
+              <a:t>CxC comerciales de 5,780,000 indica cobranza rápida (0 días).</a:t>
             </a:r>
             <a:endParaRPr lang="en-US" sz="850" dirty="0"/>
           </a:p>
@@ -10182,7 +11418,7 @@
                 <a:ea typeface="Calibri" pitchFamily="34" charset="-122"/>
                 <a:cs typeface="Calibri" pitchFamily="34" charset="-120"/>
               </a:rPr>
-              <a:t>Inventarios (mercaderías + suministros) de S/ 0 con rotación adecuada.</a:t>
+              <a:t>Inventarios (mercaderías + suministros) de S/ 4,995,000 con rotación adecuada.</a:t>
             </a:r>
             <a:endParaRPr lang="en-US" sz="850" dirty="0"/>
           </a:p>
@@ -10556,7 +11792,7 @@
                 <a:ea typeface="Calibri" pitchFamily="34" charset="-122"/>
                 <a:cs typeface="Calibri" pitchFamily="34" charset="-120"/>
               </a:rPr>
-              <a:t>Financiamiento total S/ -. Endeudamiento de -.</a:t>
+              <a:t>Financiamiento total S/ 23,255,000. Endeudamiento de -.</a:t>
             </a:r>
             <a:endParaRPr lang="en-US" sz="950" dirty="0"/>
           </a:p>
@@ -10989,6 +12225,830 @@
                         <a:buNone/>
                       </a:pPr>
                       <a:r>
+                        <a:rPr lang="en-US" sz="850" dirty="0">
+                          <a:solidFill>
+                            <a:srgbClr val="2D3748"/>
+                          </a:solidFill>
+                          <a:latin typeface="Calibri" pitchFamily="34" charset="0"/>
+                          <a:ea typeface="Calibri" pitchFamily="34" charset="-122"/>
+                          <a:cs typeface="Calibri" pitchFamily="34" charset="-120"/>
+                        </a:rPr>
+                        <a:t>  Tributos por Pagar</a:t>
+                      </a:r>
+                      <a:endParaRPr lang="en-US" sz="850" dirty="0">
+                        <a:latin typeface="Calibri" charset="0"/>
+                        <a:ea typeface="Calibri" charset="0"/>
+                        <a:cs typeface="Calibri" charset="0"/>
+                      </a:endParaRPr>
+                    </a:p>
+                  </a:txBody>
+                  <a:tcPr marL="91440" marR="91440" marT="45720" marB="45720">
+                    <a:lnL w="3810" cap="flat" cmpd="sng" algn="ctr">
+                      <a:solidFill>
+                        <a:srgbClr val="D0D0D0"/>
+                      </a:solidFill>
+                      <a:prstDash val="solid"/>
+                      <a:round/>
+                      <a:headEnd type="none" w="med" len="med"/>
+                      <a:tailEnd type="none" w="med" len="med"/>
+                    </a:lnL>
+                    <a:lnR w="3810" cap="flat" cmpd="sng" algn="ctr">
+                      <a:solidFill>
+                        <a:srgbClr val="D0D0D0"/>
+                      </a:solidFill>
+                      <a:prstDash val="solid"/>
+                      <a:round/>
+                      <a:headEnd type="none" w="med" len="med"/>
+                      <a:tailEnd type="none" w="med" len="med"/>
+                    </a:lnR>
+                    <a:lnT w="3810" cap="flat" cmpd="sng" algn="ctr">
+                      <a:solidFill>
+                        <a:srgbClr val="D0D0D0"/>
+                      </a:solidFill>
+                      <a:prstDash val="solid"/>
+                      <a:round/>
+                      <a:headEnd type="none" w="med" len="med"/>
+                      <a:tailEnd type="none" w="med" len="med"/>
+                    </a:lnT>
+                    <a:lnB w="3810" cap="flat" cmpd="sng" algn="ctr">
+                      <a:solidFill>
+                        <a:srgbClr val="D0D0D0"/>
+                      </a:solidFill>
+                      <a:prstDash val="solid"/>
+                      <a:round/>
+                      <a:headEnd type="none" w="med" len="med"/>
+                      <a:tailEnd type="none" w="med" len="med"/>
+                    </a:lnB>
+                    <a:solidFill>
+                      <a:srgbClr val="FFFFFF"/>
+                    </a:solidFill>
+                  </a:tcPr>
+                </a:tc>
+                <a:tc>
+                  <a:txBody>
+                    <a:bodyPr/>
+                    <a:lstStyle/>
+                    <a:p>
+                      <a:pPr algn="r" indent="0" marL="0">
+                        <a:buNone/>
+                      </a:pPr>
+                      <a:r>
+                        <a:rPr lang="en-US" sz="850" dirty="0">
+                          <a:solidFill>
+                            <a:srgbClr val="2D3748"/>
+                          </a:solidFill>
+                          <a:latin typeface="Calibri" pitchFamily="34" charset="0"/>
+                          <a:ea typeface="Calibri" pitchFamily="34" charset="-122"/>
+                          <a:cs typeface="Calibri" pitchFamily="34" charset="-120"/>
+                        </a:rPr>
+                        <a:t>S/ 735,000</a:t>
+                      </a:r>
+                      <a:endParaRPr lang="en-US" sz="850" dirty="0">
+                        <a:latin typeface="Calibri" charset="0"/>
+                        <a:ea typeface="Calibri" charset="0"/>
+                        <a:cs typeface="Calibri" charset="0"/>
+                      </a:endParaRPr>
+                    </a:p>
+                  </a:txBody>
+                  <a:tcPr marL="91440" marR="91440" marT="45720" marB="45720">
+                    <a:lnL w="3810" cap="flat" cmpd="sng" algn="ctr">
+                      <a:solidFill>
+                        <a:srgbClr val="D0D0D0"/>
+                      </a:solidFill>
+                      <a:prstDash val="solid"/>
+                      <a:round/>
+                      <a:headEnd type="none" w="med" len="med"/>
+                      <a:tailEnd type="none" w="med" len="med"/>
+                    </a:lnL>
+                    <a:lnR w="3810" cap="flat" cmpd="sng" algn="ctr">
+                      <a:solidFill>
+                        <a:srgbClr val="D0D0D0"/>
+                      </a:solidFill>
+                      <a:prstDash val="solid"/>
+                      <a:round/>
+                      <a:headEnd type="none" w="med" len="med"/>
+                      <a:tailEnd type="none" w="med" len="med"/>
+                    </a:lnR>
+                    <a:lnT w="3810" cap="flat" cmpd="sng" algn="ctr">
+                      <a:solidFill>
+                        <a:srgbClr val="D0D0D0"/>
+                      </a:solidFill>
+                      <a:prstDash val="solid"/>
+                      <a:round/>
+                      <a:headEnd type="none" w="med" len="med"/>
+                      <a:tailEnd type="none" w="med" len="med"/>
+                    </a:lnT>
+                    <a:lnB w="3810" cap="flat" cmpd="sng" algn="ctr">
+                      <a:solidFill>
+                        <a:srgbClr val="D0D0D0"/>
+                      </a:solidFill>
+                      <a:prstDash val="solid"/>
+                      <a:round/>
+                      <a:headEnd type="none" w="med" len="med"/>
+                      <a:tailEnd type="none" w="med" len="med"/>
+                    </a:lnB>
+                    <a:solidFill>
+                      <a:srgbClr val="FFFFFF"/>
+                    </a:solidFill>
+                  </a:tcPr>
+                </a:tc>
+                <a:tc>
+                  <a:txBody>
+                    <a:bodyPr/>
+                    <a:lstStyle/>
+                    <a:p>
+                      <a:pPr algn="r" indent="0" marL="0">
+                        <a:buNone/>
+                      </a:pPr>
+                      <a:r>
+                        <a:rPr lang="en-US" sz="850" dirty="0">
+                          <a:solidFill>
+                            <a:srgbClr val="2D3748"/>
+                          </a:solidFill>
+                          <a:latin typeface="Calibri" pitchFamily="34" charset="0"/>
+                          <a:ea typeface="Calibri" pitchFamily="34" charset="-122"/>
+                          <a:cs typeface="Calibri" pitchFamily="34" charset="-120"/>
+                        </a:rPr>
+                        <a:t>3.2%</a:t>
+                      </a:r>
+                      <a:endParaRPr lang="en-US" sz="850" dirty="0">
+                        <a:latin typeface="Calibri" charset="0"/>
+                        <a:ea typeface="Calibri" charset="0"/>
+                        <a:cs typeface="Calibri" charset="0"/>
+                      </a:endParaRPr>
+                    </a:p>
+                  </a:txBody>
+                  <a:tcPr marL="91440" marR="91440" marT="45720" marB="45720">
+                    <a:lnL w="3810" cap="flat" cmpd="sng" algn="ctr">
+                      <a:solidFill>
+                        <a:srgbClr val="D0D0D0"/>
+                      </a:solidFill>
+                      <a:prstDash val="solid"/>
+                      <a:round/>
+                      <a:headEnd type="none" w="med" len="med"/>
+                      <a:tailEnd type="none" w="med" len="med"/>
+                    </a:lnL>
+                    <a:lnR w="3810" cap="flat" cmpd="sng" algn="ctr">
+                      <a:solidFill>
+                        <a:srgbClr val="D0D0D0"/>
+                      </a:solidFill>
+                      <a:prstDash val="solid"/>
+                      <a:round/>
+                      <a:headEnd type="none" w="med" len="med"/>
+                      <a:tailEnd type="none" w="med" len="med"/>
+                    </a:lnR>
+                    <a:lnT w="3810" cap="flat" cmpd="sng" algn="ctr">
+                      <a:solidFill>
+                        <a:srgbClr val="D0D0D0"/>
+                      </a:solidFill>
+                      <a:prstDash val="solid"/>
+                      <a:round/>
+                      <a:headEnd type="none" w="med" len="med"/>
+                      <a:tailEnd type="none" w="med" len="med"/>
+                    </a:lnT>
+                    <a:lnB w="3810" cap="flat" cmpd="sng" algn="ctr">
+                      <a:solidFill>
+                        <a:srgbClr val="D0D0D0"/>
+                      </a:solidFill>
+                      <a:prstDash val="solid"/>
+                      <a:round/>
+                      <a:headEnd type="none" w="med" len="med"/>
+                      <a:tailEnd type="none" w="med" len="med"/>
+                    </a:lnB>
+                    <a:solidFill>
+                      <a:srgbClr val="FFFFFF"/>
+                    </a:solidFill>
+                  </a:tcPr>
+                </a:tc>
+              </a:tr>
+              <a:tr h="0">
+                <a:tc>
+                  <a:txBody>
+                    <a:bodyPr/>
+                    <a:lstStyle/>
+                    <a:p>
+                      <a:pPr algn="l" indent="0" marL="0">
+                        <a:buNone/>
+                      </a:pPr>
+                      <a:r>
+                        <a:rPr lang="en-US" sz="850" dirty="0">
+                          <a:solidFill>
+                            <a:srgbClr val="2D3748"/>
+                          </a:solidFill>
+                          <a:latin typeface="Calibri" pitchFamily="34" charset="0"/>
+                          <a:ea typeface="Calibri" pitchFamily="34" charset="-122"/>
+                          <a:cs typeface="Calibri" pitchFamily="34" charset="-120"/>
+                        </a:rPr>
+                        <a:t>  Remuneraciones por Pagar</a:t>
+                      </a:r>
+                      <a:endParaRPr lang="en-US" sz="850" dirty="0">
+                        <a:latin typeface="Calibri" charset="0"/>
+                        <a:ea typeface="Calibri" charset="0"/>
+                        <a:cs typeface="Calibri" charset="0"/>
+                      </a:endParaRPr>
+                    </a:p>
+                  </a:txBody>
+                  <a:tcPr marL="91440" marR="91440" marT="45720" marB="45720">
+                    <a:lnL w="3810" cap="flat" cmpd="sng" algn="ctr">
+                      <a:solidFill>
+                        <a:srgbClr val="D0D0D0"/>
+                      </a:solidFill>
+                      <a:prstDash val="solid"/>
+                      <a:round/>
+                      <a:headEnd type="none" w="med" len="med"/>
+                      <a:tailEnd type="none" w="med" len="med"/>
+                    </a:lnL>
+                    <a:lnR w="3810" cap="flat" cmpd="sng" algn="ctr">
+                      <a:solidFill>
+                        <a:srgbClr val="D0D0D0"/>
+                      </a:solidFill>
+                      <a:prstDash val="solid"/>
+                      <a:round/>
+                      <a:headEnd type="none" w="med" len="med"/>
+                      <a:tailEnd type="none" w="med" len="med"/>
+                    </a:lnR>
+                    <a:lnT w="3810" cap="flat" cmpd="sng" algn="ctr">
+                      <a:solidFill>
+                        <a:srgbClr val="D0D0D0"/>
+                      </a:solidFill>
+                      <a:prstDash val="solid"/>
+                      <a:round/>
+                      <a:headEnd type="none" w="med" len="med"/>
+                      <a:tailEnd type="none" w="med" len="med"/>
+                    </a:lnT>
+                    <a:lnB w="3810" cap="flat" cmpd="sng" algn="ctr">
+                      <a:solidFill>
+                        <a:srgbClr val="D0D0D0"/>
+                      </a:solidFill>
+                      <a:prstDash val="solid"/>
+                      <a:round/>
+                      <a:headEnd type="none" w="med" len="med"/>
+                      <a:tailEnd type="none" w="med" len="med"/>
+                    </a:lnB>
+                    <a:solidFill>
+                      <a:srgbClr val="F8F9FA"/>
+                    </a:solidFill>
+                  </a:tcPr>
+                </a:tc>
+                <a:tc>
+                  <a:txBody>
+                    <a:bodyPr/>
+                    <a:lstStyle/>
+                    <a:p>
+                      <a:pPr algn="r" indent="0" marL="0">
+                        <a:buNone/>
+                      </a:pPr>
+                      <a:r>
+                        <a:rPr lang="en-US" sz="850" dirty="0">
+                          <a:solidFill>
+                            <a:srgbClr val="2D3748"/>
+                          </a:solidFill>
+                          <a:latin typeface="Calibri" pitchFamily="34" charset="0"/>
+                          <a:ea typeface="Calibri" pitchFamily="34" charset="-122"/>
+                          <a:cs typeface="Calibri" pitchFamily="34" charset="-120"/>
+                        </a:rPr>
+                        <a:t>S/ 432,000</a:t>
+                      </a:r>
+                      <a:endParaRPr lang="en-US" sz="850" dirty="0">
+                        <a:latin typeface="Calibri" charset="0"/>
+                        <a:ea typeface="Calibri" charset="0"/>
+                        <a:cs typeface="Calibri" charset="0"/>
+                      </a:endParaRPr>
+                    </a:p>
+                  </a:txBody>
+                  <a:tcPr marL="91440" marR="91440" marT="45720" marB="45720">
+                    <a:lnL w="3810" cap="flat" cmpd="sng" algn="ctr">
+                      <a:solidFill>
+                        <a:srgbClr val="D0D0D0"/>
+                      </a:solidFill>
+                      <a:prstDash val="solid"/>
+                      <a:round/>
+                      <a:headEnd type="none" w="med" len="med"/>
+                      <a:tailEnd type="none" w="med" len="med"/>
+                    </a:lnL>
+                    <a:lnR w="3810" cap="flat" cmpd="sng" algn="ctr">
+                      <a:solidFill>
+                        <a:srgbClr val="D0D0D0"/>
+                      </a:solidFill>
+                      <a:prstDash val="solid"/>
+                      <a:round/>
+                      <a:headEnd type="none" w="med" len="med"/>
+                      <a:tailEnd type="none" w="med" len="med"/>
+                    </a:lnR>
+                    <a:lnT w="3810" cap="flat" cmpd="sng" algn="ctr">
+                      <a:solidFill>
+                        <a:srgbClr val="D0D0D0"/>
+                      </a:solidFill>
+                      <a:prstDash val="solid"/>
+                      <a:round/>
+                      <a:headEnd type="none" w="med" len="med"/>
+                      <a:tailEnd type="none" w="med" len="med"/>
+                    </a:lnT>
+                    <a:lnB w="3810" cap="flat" cmpd="sng" algn="ctr">
+                      <a:solidFill>
+                        <a:srgbClr val="D0D0D0"/>
+                      </a:solidFill>
+                      <a:prstDash val="solid"/>
+                      <a:round/>
+                      <a:headEnd type="none" w="med" len="med"/>
+                      <a:tailEnd type="none" w="med" len="med"/>
+                    </a:lnB>
+                    <a:solidFill>
+                      <a:srgbClr val="F8F9FA"/>
+                    </a:solidFill>
+                  </a:tcPr>
+                </a:tc>
+                <a:tc>
+                  <a:txBody>
+                    <a:bodyPr/>
+                    <a:lstStyle/>
+                    <a:p>
+                      <a:pPr algn="r" indent="0" marL="0">
+                        <a:buNone/>
+                      </a:pPr>
+                      <a:r>
+                        <a:rPr lang="en-US" sz="850" dirty="0">
+                          <a:solidFill>
+                            <a:srgbClr val="2D3748"/>
+                          </a:solidFill>
+                          <a:latin typeface="Calibri" pitchFamily="34" charset="0"/>
+                          <a:ea typeface="Calibri" pitchFamily="34" charset="-122"/>
+                          <a:cs typeface="Calibri" pitchFamily="34" charset="-120"/>
+                        </a:rPr>
+                        <a:t>1.9%</a:t>
+                      </a:r>
+                      <a:endParaRPr lang="en-US" sz="850" dirty="0">
+                        <a:latin typeface="Calibri" charset="0"/>
+                        <a:ea typeface="Calibri" charset="0"/>
+                        <a:cs typeface="Calibri" charset="0"/>
+                      </a:endParaRPr>
+                    </a:p>
+                  </a:txBody>
+                  <a:tcPr marL="91440" marR="91440" marT="45720" marB="45720">
+                    <a:lnL w="3810" cap="flat" cmpd="sng" algn="ctr">
+                      <a:solidFill>
+                        <a:srgbClr val="D0D0D0"/>
+                      </a:solidFill>
+                      <a:prstDash val="solid"/>
+                      <a:round/>
+                      <a:headEnd type="none" w="med" len="med"/>
+                      <a:tailEnd type="none" w="med" len="med"/>
+                    </a:lnL>
+                    <a:lnR w="3810" cap="flat" cmpd="sng" algn="ctr">
+                      <a:solidFill>
+                        <a:srgbClr val="D0D0D0"/>
+                      </a:solidFill>
+                      <a:prstDash val="solid"/>
+                      <a:round/>
+                      <a:headEnd type="none" w="med" len="med"/>
+                      <a:tailEnd type="none" w="med" len="med"/>
+                    </a:lnR>
+                    <a:lnT w="3810" cap="flat" cmpd="sng" algn="ctr">
+                      <a:solidFill>
+                        <a:srgbClr val="D0D0D0"/>
+                      </a:solidFill>
+                      <a:prstDash val="solid"/>
+                      <a:round/>
+                      <a:headEnd type="none" w="med" len="med"/>
+                      <a:tailEnd type="none" w="med" len="med"/>
+                    </a:lnT>
+                    <a:lnB w="3810" cap="flat" cmpd="sng" algn="ctr">
+                      <a:solidFill>
+                        <a:srgbClr val="D0D0D0"/>
+                      </a:solidFill>
+                      <a:prstDash val="solid"/>
+                      <a:round/>
+                      <a:headEnd type="none" w="med" len="med"/>
+                      <a:tailEnd type="none" w="med" len="med"/>
+                    </a:lnB>
+                    <a:solidFill>
+                      <a:srgbClr val="F8F9FA"/>
+                    </a:solidFill>
+                  </a:tcPr>
+                </a:tc>
+              </a:tr>
+              <a:tr h="0">
+                <a:tc>
+                  <a:txBody>
+                    <a:bodyPr/>
+                    <a:lstStyle/>
+                    <a:p>
+                      <a:pPr algn="l" indent="0" marL="0">
+                        <a:buNone/>
+                      </a:pPr>
+                      <a:r>
+                        <a:rPr lang="en-US" sz="850" dirty="0">
+                          <a:solidFill>
+                            <a:srgbClr val="2D3748"/>
+                          </a:solidFill>
+                          <a:latin typeface="Calibri" pitchFamily="34" charset="0"/>
+                          <a:ea typeface="Calibri" pitchFamily="34" charset="-122"/>
+                          <a:cs typeface="Calibri" pitchFamily="34" charset="-120"/>
+                        </a:rPr>
+                        <a:t>  CxP Comerciales</a:t>
+                      </a:r>
+                      <a:endParaRPr lang="en-US" sz="850" dirty="0">
+                        <a:latin typeface="Calibri" charset="0"/>
+                        <a:ea typeface="Calibri" charset="0"/>
+                        <a:cs typeface="Calibri" charset="0"/>
+                      </a:endParaRPr>
+                    </a:p>
+                  </a:txBody>
+                  <a:tcPr marL="91440" marR="91440" marT="45720" marB="45720">
+                    <a:lnL w="3810" cap="flat" cmpd="sng" algn="ctr">
+                      <a:solidFill>
+                        <a:srgbClr val="D0D0D0"/>
+                      </a:solidFill>
+                      <a:prstDash val="solid"/>
+                      <a:round/>
+                      <a:headEnd type="none" w="med" len="med"/>
+                      <a:tailEnd type="none" w="med" len="med"/>
+                    </a:lnL>
+                    <a:lnR w="3810" cap="flat" cmpd="sng" algn="ctr">
+                      <a:solidFill>
+                        <a:srgbClr val="D0D0D0"/>
+                      </a:solidFill>
+                      <a:prstDash val="solid"/>
+                      <a:round/>
+                      <a:headEnd type="none" w="med" len="med"/>
+                      <a:tailEnd type="none" w="med" len="med"/>
+                    </a:lnR>
+                    <a:lnT w="3810" cap="flat" cmpd="sng" algn="ctr">
+                      <a:solidFill>
+                        <a:srgbClr val="D0D0D0"/>
+                      </a:solidFill>
+                      <a:prstDash val="solid"/>
+                      <a:round/>
+                      <a:headEnd type="none" w="med" len="med"/>
+                      <a:tailEnd type="none" w="med" len="med"/>
+                    </a:lnT>
+                    <a:lnB w="3810" cap="flat" cmpd="sng" algn="ctr">
+                      <a:solidFill>
+                        <a:srgbClr val="D0D0D0"/>
+                      </a:solidFill>
+                      <a:prstDash val="solid"/>
+                      <a:round/>
+                      <a:headEnd type="none" w="med" len="med"/>
+                      <a:tailEnd type="none" w="med" len="med"/>
+                    </a:lnB>
+                    <a:solidFill>
+                      <a:srgbClr val="FFFFFF"/>
+                    </a:solidFill>
+                  </a:tcPr>
+                </a:tc>
+                <a:tc>
+                  <a:txBody>
+                    <a:bodyPr/>
+                    <a:lstStyle/>
+                    <a:p>
+                      <a:pPr algn="r" indent="0" marL="0">
+                        <a:buNone/>
+                      </a:pPr>
+                      <a:r>
+                        <a:rPr lang="en-US" sz="850" dirty="0">
+                          <a:solidFill>
+                            <a:srgbClr val="2D3748"/>
+                          </a:solidFill>
+                          <a:latin typeface="Calibri" pitchFamily="34" charset="0"/>
+                          <a:ea typeface="Calibri" pitchFamily="34" charset="-122"/>
+                          <a:cs typeface="Calibri" pitchFamily="34" charset="-120"/>
+                        </a:rPr>
+                        <a:t>S/ 9,780,000</a:t>
+                      </a:r>
+                      <a:endParaRPr lang="en-US" sz="850" dirty="0">
+                        <a:latin typeface="Calibri" charset="0"/>
+                        <a:ea typeface="Calibri" charset="0"/>
+                        <a:cs typeface="Calibri" charset="0"/>
+                      </a:endParaRPr>
+                    </a:p>
+                  </a:txBody>
+                  <a:tcPr marL="91440" marR="91440" marT="45720" marB="45720">
+                    <a:lnL w="3810" cap="flat" cmpd="sng" algn="ctr">
+                      <a:solidFill>
+                        <a:srgbClr val="D0D0D0"/>
+                      </a:solidFill>
+                      <a:prstDash val="solid"/>
+                      <a:round/>
+                      <a:headEnd type="none" w="med" len="med"/>
+                      <a:tailEnd type="none" w="med" len="med"/>
+                    </a:lnL>
+                    <a:lnR w="3810" cap="flat" cmpd="sng" algn="ctr">
+                      <a:solidFill>
+                        <a:srgbClr val="D0D0D0"/>
+                      </a:solidFill>
+                      <a:prstDash val="solid"/>
+                      <a:round/>
+                      <a:headEnd type="none" w="med" len="med"/>
+                      <a:tailEnd type="none" w="med" len="med"/>
+                    </a:lnR>
+                    <a:lnT w="3810" cap="flat" cmpd="sng" algn="ctr">
+                      <a:solidFill>
+                        <a:srgbClr val="D0D0D0"/>
+                      </a:solidFill>
+                      <a:prstDash val="solid"/>
+                      <a:round/>
+                      <a:headEnd type="none" w="med" len="med"/>
+                      <a:tailEnd type="none" w="med" len="med"/>
+                    </a:lnT>
+                    <a:lnB w="3810" cap="flat" cmpd="sng" algn="ctr">
+                      <a:solidFill>
+                        <a:srgbClr val="D0D0D0"/>
+                      </a:solidFill>
+                      <a:prstDash val="solid"/>
+                      <a:round/>
+                      <a:headEnd type="none" w="med" len="med"/>
+                      <a:tailEnd type="none" w="med" len="med"/>
+                    </a:lnB>
+                    <a:solidFill>
+                      <a:srgbClr val="FFFFFF"/>
+                    </a:solidFill>
+                  </a:tcPr>
+                </a:tc>
+                <a:tc>
+                  <a:txBody>
+                    <a:bodyPr/>
+                    <a:lstStyle/>
+                    <a:p>
+                      <a:pPr algn="r" indent="0" marL="0">
+                        <a:buNone/>
+                      </a:pPr>
+                      <a:r>
+                        <a:rPr lang="en-US" sz="850" dirty="0">
+                          <a:solidFill>
+                            <a:srgbClr val="2D3748"/>
+                          </a:solidFill>
+                          <a:latin typeface="Calibri" pitchFamily="34" charset="0"/>
+                          <a:ea typeface="Calibri" pitchFamily="34" charset="-122"/>
+                          <a:cs typeface="Calibri" pitchFamily="34" charset="-120"/>
+                        </a:rPr>
+                        <a:t>42.1%</a:t>
+                      </a:r>
+                      <a:endParaRPr lang="en-US" sz="850" dirty="0">
+                        <a:latin typeface="Calibri" charset="0"/>
+                        <a:ea typeface="Calibri" charset="0"/>
+                        <a:cs typeface="Calibri" charset="0"/>
+                      </a:endParaRPr>
+                    </a:p>
+                  </a:txBody>
+                  <a:tcPr marL="91440" marR="91440" marT="45720" marB="45720">
+                    <a:lnL w="3810" cap="flat" cmpd="sng" algn="ctr">
+                      <a:solidFill>
+                        <a:srgbClr val="D0D0D0"/>
+                      </a:solidFill>
+                      <a:prstDash val="solid"/>
+                      <a:round/>
+                      <a:headEnd type="none" w="med" len="med"/>
+                      <a:tailEnd type="none" w="med" len="med"/>
+                    </a:lnL>
+                    <a:lnR w="3810" cap="flat" cmpd="sng" algn="ctr">
+                      <a:solidFill>
+                        <a:srgbClr val="D0D0D0"/>
+                      </a:solidFill>
+                      <a:prstDash val="solid"/>
+                      <a:round/>
+                      <a:headEnd type="none" w="med" len="med"/>
+                      <a:tailEnd type="none" w="med" len="med"/>
+                    </a:lnR>
+                    <a:lnT w="3810" cap="flat" cmpd="sng" algn="ctr">
+                      <a:solidFill>
+                        <a:srgbClr val="D0D0D0"/>
+                      </a:solidFill>
+                      <a:prstDash val="solid"/>
+                      <a:round/>
+                      <a:headEnd type="none" w="med" len="med"/>
+                      <a:tailEnd type="none" w="med" len="med"/>
+                    </a:lnT>
+                    <a:lnB w="3810" cap="flat" cmpd="sng" algn="ctr">
+                      <a:solidFill>
+                        <a:srgbClr val="D0D0D0"/>
+                      </a:solidFill>
+                      <a:prstDash val="solid"/>
+                      <a:round/>
+                      <a:headEnd type="none" w="med" len="med"/>
+                      <a:tailEnd type="none" w="med" len="med"/>
+                    </a:lnB>
+                    <a:solidFill>
+                      <a:srgbClr val="FFFFFF"/>
+                    </a:solidFill>
+                  </a:tcPr>
+                </a:tc>
+              </a:tr>
+              <a:tr h="0">
+                <a:tc>
+                  <a:txBody>
+                    <a:bodyPr/>
+                    <a:lstStyle/>
+                    <a:p>
+                      <a:pPr algn="l" indent="0" marL="0">
+                        <a:buNone/>
+                      </a:pPr>
+                      <a:r>
+                        <a:rPr lang="en-US" sz="850" dirty="0">
+                          <a:solidFill>
+                            <a:srgbClr val="2D3748"/>
+                          </a:solidFill>
+                          <a:latin typeface="Calibri" pitchFamily="34" charset="0"/>
+                          <a:ea typeface="Calibri" pitchFamily="34" charset="-122"/>
+                          <a:cs typeface="Calibri" pitchFamily="34" charset="-120"/>
+                        </a:rPr>
+                        <a:t>  CxP Diversas</a:t>
+                      </a:r>
+                      <a:endParaRPr lang="en-US" sz="850" dirty="0">
+                        <a:latin typeface="Calibri" charset="0"/>
+                        <a:ea typeface="Calibri" charset="0"/>
+                        <a:cs typeface="Calibri" charset="0"/>
+                      </a:endParaRPr>
+                    </a:p>
+                  </a:txBody>
+                  <a:tcPr marL="91440" marR="91440" marT="45720" marB="45720">
+                    <a:lnL w="3810" cap="flat" cmpd="sng" algn="ctr">
+                      <a:solidFill>
+                        <a:srgbClr val="D0D0D0"/>
+                      </a:solidFill>
+                      <a:prstDash val="solid"/>
+                      <a:round/>
+                      <a:headEnd type="none" w="med" len="med"/>
+                      <a:tailEnd type="none" w="med" len="med"/>
+                    </a:lnL>
+                    <a:lnR w="3810" cap="flat" cmpd="sng" algn="ctr">
+                      <a:solidFill>
+                        <a:srgbClr val="D0D0D0"/>
+                      </a:solidFill>
+                      <a:prstDash val="solid"/>
+                      <a:round/>
+                      <a:headEnd type="none" w="med" len="med"/>
+                      <a:tailEnd type="none" w="med" len="med"/>
+                    </a:lnR>
+                    <a:lnT w="3810" cap="flat" cmpd="sng" algn="ctr">
+                      <a:solidFill>
+                        <a:srgbClr val="D0D0D0"/>
+                      </a:solidFill>
+                      <a:prstDash val="solid"/>
+                      <a:round/>
+                      <a:headEnd type="none" w="med" len="med"/>
+                      <a:tailEnd type="none" w="med" len="med"/>
+                    </a:lnT>
+                    <a:lnB w="3810" cap="flat" cmpd="sng" algn="ctr">
+                      <a:solidFill>
+                        <a:srgbClr val="D0D0D0"/>
+                      </a:solidFill>
+                      <a:prstDash val="solid"/>
+                      <a:round/>
+                      <a:headEnd type="none" w="med" len="med"/>
+                      <a:tailEnd type="none" w="med" len="med"/>
+                    </a:lnB>
+                    <a:solidFill>
+                      <a:srgbClr val="F8F9FA"/>
+                    </a:solidFill>
+                  </a:tcPr>
+                </a:tc>
+                <a:tc>
+                  <a:txBody>
+                    <a:bodyPr/>
+                    <a:lstStyle/>
+                    <a:p>
+                      <a:pPr algn="r" indent="0" marL="0">
+                        <a:buNone/>
+                      </a:pPr>
+                      <a:r>
+                        <a:rPr lang="en-US" sz="850" dirty="0">
+                          <a:solidFill>
+                            <a:srgbClr val="2D3748"/>
+                          </a:solidFill>
+                          <a:latin typeface="Calibri" pitchFamily="34" charset="0"/>
+                          <a:ea typeface="Calibri" pitchFamily="34" charset="-122"/>
+                          <a:cs typeface="Calibri" pitchFamily="34" charset="-120"/>
+                        </a:rPr>
+                        <a:t>S/ 1,310,000</a:t>
+                      </a:r>
+                      <a:endParaRPr lang="en-US" sz="850" dirty="0">
+                        <a:latin typeface="Calibri" charset="0"/>
+                        <a:ea typeface="Calibri" charset="0"/>
+                        <a:cs typeface="Calibri" charset="0"/>
+                      </a:endParaRPr>
+                    </a:p>
+                  </a:txBody>
+                  <a:tcPr marL="91440" marR="91440" marT="45720" marB="45720">
+                    <a:lnL w="3810" cap="flat" cmpd="sng" algn="ctr">
+                      <a:solidFill>
+                        <a:srgbClr val="D0D0D0"/>
+                      </a:solidFill>
+                      <a:prstDash val="solid"/>
+                      <a:round/>
+                      <a:headEnd type="none" w="med" len="med"/>
+                      <a:tailEnd type="none" w="med" len="med"/>
+                    </a:lnL>
+                    <a:lnR w="3810" cap="flat" cmpd="sng" algn="ctr">
+                      <a:solidFill>
+                        <a:srgbClr val="D0D0D0"/>
+                      </a:solidFill>
+                      <a:prstDash val="solid"/>
+                      <a:round/>
+                      <a:headEnd type="none" w="med" len="med"/>
+                      <a:tailEnd type="none" w="med" len="med"/>
+                    </a:lnR>
+                    <a:lnT w="3810" cap="flat" cmpd="sng" algn="ctr">
+                      <a:solidFill>
+                        <a:srgbClr val="D0D0D0"/>
+                      </a:solidFill>
+                      <a:prstDash val="solid"/>
+                      <a:round/>
+                      <a:headEnd type="none" w="med" len="med"/>
+                      <a:tailEnd type="none" w="med" len="med"/>
+                    </a:lnT>
+                    <a:lnB w="3810" cap="flat" cmpd="sng" algn="ctr">
+                      <a:solidFill>
+                        <a:srgbClr val="D0D0D0"/>
+                      </a:solidFill>
+                      <a:prstDash val="solid"/>
+                      <a:round/>
+                      <a:headEnd type="none" w="med" len="med"/>
+                      <a:tailEnd type="none" w="med" len="med"/>
+                    </a:lnB>
+                    <a:solidFill>
+                      <a:srgbClr val="F8F9FA"/>
+                    </a:solidFill>
+                  </a:tcPr>
+                </a:tc>
+                <a:tc>
+                  <a:txBody>
+                    <a:bodyPr/>
+                    <a:lstStyle/>
+                    <a:p>
+                      <a:pPr algn="r" indent="0" marL="0">
+                        <a:buNone/>
+                      </a:pPr>
+                      <a:r>
+                        <a:rPr lang="en-US" sz="850" dirty="0">
+                          <a:solidFill>
+                            <a:srgbClr val="2D3748"/>
+                          </a:solidFill>
+                          <a:latin typeface="Calibri" pitchFamily="34" charset="0"/>
+                          <a:ea typeface="Calibri" pitchFamily="34" charset="-122"/>
+                          <a:cs typeface="Calibri" pitchFamily="34" charset="-120"/>
+                        </a:rPr>
+                        <a:t>5.6%</a:t>
+                      </a:r>
+                      <a:endParaRPr lang="en-US" sz="850" dirty="0">
+                        <a:latin typeface="Calibri" charset="0"/>
+                        <a:ea typeface="Calibri" charset="0"/>
+                        <a:cs typeface="Calibri" charset="0"/>
+                      </a:endParaRPr>
+                    </a:p>
+                  </a:txBody>
+                  <a:tcPr marL="91440" marR="91440" marT="45720" marB="45720">
+                    <a:lnL w="3810" cap="flat" cmpd="sng" algn="ctr">
+                      <a:solidFill>
+                        <a:srgbClr val="D0D0D0"/>
+                      </a:solidFill>
+                      <a:prstDash val="solid"/>
+                      <a:round/>
+                      <a:headEnd type="none" w="med" len="med"/>
+                      <a:tailEnd type="none" w="med" len="med"/>
+                    </a:lnL>
+                    <a:lnR w="3810" cap="flat" cmpd="sng" algn="ctr">
+                      <a:solidFill>
+                        <a:srgbClr val="D0D0D0"/>
+                      </a:solidFill>
+                      <a:prstDash val="solid"/>
+                      <a:round/>
+                      <a:headEnd type="none" w="med" len="med"/>
+                      <a:tailEnd type="none" w="med" len="med"/>
+                    </a:lnR>
+                    <a:lnT w="3810" cap="flat" cmpd="sng" algn="ctr">
+                      <a:solidFill>
+                        <a:srgbClr val="D0D0D0"/>
+                      </a:solidFill>
+                      <a:prstDash val="solid"/>
+                      <a:round/>
+                      <a:headEnd type="none" w="med" len="med"/>
+                      <a:tailEnd type="none" w="med" len="med"/>
+                    </a:lnT>
+                    <a:lnB w="3810" cap="flat" cmpd="sng" algn="ctr">
+                      <a:solidFill>
+                        <a:srgbClr val="D0D0D0"/>
+                      </a:solidFill>
+                      <a:prstDash val="solid"/>
+                      <a:round/>
+                      <a:headEnd type="none" w="med" len="med"/>
+                      <a:tailEnd type="none" w="med" len="med"/>
+                    </a:lnB>
+                    <a:solidFill>
+                      <a:srgbClr val="F8F9FA"/>
+                    </a:solidFill>
+                  </a:tcPr>
+                </a:tc>
+              </a:tr>
+              <a:tr h="0">
+                <a:tc>
+                  <a:txBody>
+                    <a:bodyPr/>
+                    <a:lstStyle/>
+                    <a:p>
+                      <a:pPr algn="l" indent="0" marL="0">
+                        <a:buNone/>
+                      </a:pPr>
+                      <a:r>
                         <a:rPr lang="en-US" sz="850" b="1" dirty="0">
                           <a:solidFill>
                             <a:srgbClr val="2D3748"/>
@@ -11133,7 +13193,7 @@
                           <a:ea typeface="Calibri" pitchFamily="34" charset="-122"/>
                           <a:cs typeface="Calibri" pitchFamily="34" charset="-120"/>
                         </a:rPr>
-                        <a:t>NaN%</a:t>
+                        <a:t>53.5%</a:t>
                       </a:r>
                       <a:endParaRPr lang="en-US" sz="850" dirty="0">
                         <a:latin typeface="Calibri" charset="0"/>
@@ -11523,7 +13583,7 @@
                           <a:ea typeface="Calibri" pitchFamily="34" charset="-122"/>
                           <a:cs typeface="Calibri" pitchFamily="34" charset="-120"/>
                         </a:rPr>
-                        <a:t>NaN%</a:t>
+                        <a:t>14.1%</a:t>
                       </a:r>
                       <a:endParaRPr lang="en-US" sz="850" dirty="0">
                         <a:latin typeface="Calibri" charset="0"/>
@@ -11729,7 +13789,7 @@
                           <a:ea typeface="Calibri" pitchFamily="34" charset="-122"/>
                           <a:cs typeface="Calibri" pitchFamily="34" charset="-120"/>
                         </a:rPr>
-                        <a:t>NaN%</a:t>
+                        <a:t>67.6%</a:t>
                       </a:r>
                       <a:endParaRPr lang="en-US" sz="850" dirty="0">
                         <a:latin typeface="Calibri" charset="0"/>
@@ -11975,6 +14035,624 @@
                         <a:buNone/>
                       </a:pPr>
                       <a:r>
+                        <a:rPr lang="en-US" sz="850" dirty="0">
+                          <a:solidFill>
+                            <a:srgbClr val="2D3748"/>
+                          </a:solidFill>
+                          <a:latin typeface="Calibri" pitchFamily="34" charset="0"/>
+                          <a:ea typeface="Calibri" pitchFamily="34" charset="-122"/>
+                          <a:cs typeface="Calibri" pitchFamily="34" charset="-120"/>
+                        </a:rPr>
+                        <a:t>  Capital Social</a:t>
+                      </a:r>
+                      <a:endParaRPr lang="en-US" sz="850" dirty="0">
+                        <a:latin typeface="Calibri" charset="0"/>
+                        <a:ea typeface="Calibri" charset="0"/>
+                        <a:cs typeface="Calibri" charset="0"/>
+                      </a:endParaRPr>
+                    </a:p>
+                  </a:txBody>
+                  <a:tcPr marL="91440" marR="91440" marT="45720" marB="45720">
+                    <a:lnL w="3810" cap="flat" cmpd="sng" algn="ctr">
+                      <a:solidFill>
+                        <a:srgbClr val="D0D0D0"/>
+                      </a:solidFill>
+                      <a:prstDash val="solid"/>
+                      <a:round/>
+                      <a:headEnd type="none" w="med" len="med"/>
+                      <a:tailEnd type="none" w="med" len="med"/>
+                    </a:lnL>
+                    <a:lnR w="3810" cap="flat" cmpd="sng" algn="ctr">
+                      <a:solidFill>
+                        <a:srgbClr val="D0D0D0"/>
+                      </a:solidFill>
+                      <a:prstDash val="solid"/>
+                      <a:round/>
+                      <a:headEnd type="none" w="med" len="med"/>
+                      <a:tailEnd type="none" w="med" len="med"/>
+                    </a:lnR>
+                    <a:lnT w="3810" cap="flat" cmpd="sng" algn="ctr">
+                      <a:solidFill>
+                        <a:srgbClr val="D0D0D0"/>
+                      </a:solidFill>
+                      <a:prstDash val="solid"/>
+                      <a:round/>
+                      <a:headEnd type="none" w="med" len="med"/>
+                      <a:tailEnd type="none" w="med" len="med"/>
+                    </a:lnT>
+                    <a:lnB w="3810" cap="flat" cmpd="sng" algn="ctr">
+                      <a:solidFill>
+                        <a:srgbClr val="D0D0D0"/>
+                      </a:solidFill>
+                      <a:prstDash val="solid"/>
+                      <a:round/>
+                      <a:headEnd type="none" w="med" len="med"/>
+                      <a:tailEnd type="none" w="med" len="med"/>
+                    </a:lnB>
+                    <a:solidFill>
+                      <a:srgbClr val="FFFFFF"/>
+                    </a:solidFill>
+                  </a:tcPr>
+                </a:tc>
+                <a:tc>
+                  <a:txBody>
+                    <a:bodyPr/>
+                    <a:lstStyle/>
+                    <a:p>
+                      <a:pPr algn="r" indent="0" marL="0">
+                        <a:buNone/>
+                      </a:pPr>
+                      <a:r>
+                        <a:rPr lang="en-US" sz="850" dirty="0">
+                          <a:solidFill>
+                            <a:srgbClr val="2D3748"/>
+                          </a:solidFill>
+                          <a:latin typeface="Calibri" pitchFamily="34" charset="0"/>
+                          <a:ea typeface="Calibri" pitchFamily="34" charset="-122"/>
+                          <a:cs typeface="Calibri" pitchFamily="34" charset="-120"/>
+                        </a:rPr>
+                        <a:t>S/ 3,000,000</a:t>
+                      </a:r>
+                      <a:endParaRPr lang="en-US" sz="850" dirty="0">
+                        <a:latin typeface="Calibri" charset="0"/>
+                        <a:ea typeface="Calibri" charset="0"/>
+                        <a:cs typeface="Calibri" charset="0"/>
+                      </a:endParaRPr>
+                    </a:p>
+                  </a:txBody>
+                  <a:tcPr marL="91440" marR="91440" marT="45720" marB="45720">
+                    <a:lnL w="3810" cap="flat" cmpd="sng" algn="ctr">
+                      <a:solidFill>
+                        <a:srgbClr val="D0D0D0"/>
+                      </a:solidFill>
+                      <a:prstDash val="solid"/>
+                      <a:round/>
+                      <a:headEnd type="none" w="med" len="med"/>
+                      <a:tailEnd type="none" w="med" len="med"/>
+                    </a:lnL>
+                    <a:lnR w="3810" cap="flat" cmpd="sng" algn="ctr">
+                      <a:solidFill>
+                        <a:srgbClr val="D0D0D0"/>
+                      </a:solidFill>
+                      <a:prstDash val="solid"/>
+                      <a:round/>
+                      <a:headEnd type="none" w="med" len="med"/>
+                      <a:tailEnd type="none" w="med" len="med"/>
+                    </a:lnR>
+                    <a:lnT w="3810" cap="flat" cmpd="sng" algn="ctr">
+                      <a:solidFill>
+                        <a:srgbClr val="D0D0D0"/>
+                      </a:solidFill>
+                      <a:prstDash val="solid"/>
+                      <a:round/>
+                      <a:headEnd type="none" w="med" len="med"/>
+                      <a:tailEnd type="none" w="med" len="med"/>
+                    </a:lnT>
+                    <a:lnB w="3810" cap="flat" cmpd="sng" algn="ctr">
+                      <a:solidFill>
+                        <a:srgbClr val="D0D0D0"/>
+                      </a:solidFill>
+                      <a:prstDash val="solid"/>
+                      <a:round/>
+                      <a:headEnd type="none" w="med" len="med"/>
+                      <a:tailEnd type="none" w="med" len="med"/>
+                    </a:lnB>
+                    <a:solidFill>
+                      <a:srgbClr val="FFFFFF"/>
+                    </a:solidFill>
+                  </a:tcPr>
+                </a:tc>
+                <a:tc>
+                  <a:txBody>
+                    <a:bodyPr/>
+                    <a:lstStyle/>
+                    <a:p>
+                      <a:pPr algn="r" indent="0" marL="0">
+                        <a:buNone/>
+                      </a:pPr>
+                      <a:r>
+                        <a:rPr lang="en-US" sz="850" dirty="0">
+                          <a:solidFill>
+                            <a:srgbClr val="2D3748"/>
+                          </a:solidFill>
+                          <a:latin typeface="Calibri" pitchFamily="34" charset="0"/>
+                          <a:ea typeface="Calibri" pitchFamily="34" charset="-122"/>
+                          <a:cs typeface="Calibri" pitchFamily="34" charset="-120"/>
+                        </a:rPr>
+                        <a:t>12.9%</a:t>
+                      </a:r>
+                      <a:endParaRPr lang="en-US" sz="850" dirty="0">
+                        <a:latin typeface="Calibri" charset="0"/>
+                        <a:ea typeface="Calibri" charset="0"/>
+                        <a:cs typeface="Calibri" charset="0"/>
+                      </a:endParaRPr>
+                    </a:p>
+                  </a:txBody>
+                  <a:tcPr marL="91440" marR="91440" marT="45720" marB="45720">
+                    <a:lnL w="3810" cap="flat" cmpd="sng" algn="ctr">
+                      <a:solidFill>
+                        <a:srgbClr val="D0D0D0"/>
+                      </a:solidFill>
+                      <a:prstDash val="solid"/>
+                      <a:round/>
+                      <a:headEnd type="none" w="med" len="med"/>
+                      <a:tailEnd type="none" w="med" len="med"/>
+                    </a:lnL>
+                    <a:lnR w="3810" cap="flat" cmpd="sng" algn="ctr">
+                      <a:solidFill>
+                        <a:srgbClr val="D0D0D0"/>
+                      </a:solidFill>
+                      <a:prstDash val="solid"/>
+                      <a:round/>
+                      <a:headEnd type="none" w="med" len="med"/>
+                      <a:tailEnd type="none" w="med" len="med"/>
+                    </a:lnR>
+                    <a:lnT w="3810" cap="flat" cmpd="sng" algn="ctr">
+                      <a:solidFill>
+                        <a:srgbClr val="D0D0D0"/>
+                      </a:solidFill>
+                      <a:prstDash val="solid"/>
+                      <a:round/>
+                      <a:headEnd type="none" w="med" len="med"/>
+                      <a:tailEnd type="none" w="med" len="med"/>
+                    </a:lnT>
+                    <a:lnB w="3810" cap="flat" cmpd="sng" algn="ctr">
+                      <a:solidFill>
+                        <a:srgbClr val="D0D0D0"/>
+                      </a:solidFill>
+                      <a:prstDash val="solid"/>
+                      <a:round/>
+                      <a:headEnd type="none" w="med" len="med"/>
+                      <a:tailEnd type="none" w="med" len="med"/>
+                    </a:lnB>
+                    <a:solidFill>
+                      <a:srgbClr val="FFFFFF"/>
+                    </a:solidFill>
+                  </a:tcPr>
+                </a:tc>
+              </a:tr>
+              <a:tr h="0">
+                <a:tc>
+                  <a:txBody>
+                    <a:bodyPr/>
+                    <a:lstStyle/>
+                    <a:p>
+                      <a:pPr algn="l" indent="0" marL="0">
+                        <a:buNone/>
+                      </a:pPr>
+                      <a:r>
+                        <a:rPr lang="en-US" sz="850" dirty="0">
+                          <a:solidFill>
+                            <a:srgbClr val="2D3748"/>
+                          </a:solidFill>
+                          <a:latin typeface="Calibri" pitchFamily="34" charset="0"/>
+                          <a:ea typeface="Calibri" pitchFamily="34" charset="-122"/>
+                          <a:cs typeface="Calibri" pitchFamily="34" charset="-120"/>
+                        </a:rPr>
+                        <a:t>  Resultados Acumulados</a:t>
+                      </a:r>
+                      <a:endParaRPr lang="en-US" sz="850" dirty="0">
+                        <a:latin typeface="Calibri" charset="0"/>
+                        <a:ea typeface="Calibri" charset="0"/>
+                        <a:cs typeface="Calibri" charset="0"/>
+                      </a:endParaRPr>
+                    </a:p>
+                  </a:txBody>
+                  <a:tcPr marL="91440" marR="91440" marT="45720" marB="45720">
+                    <a:lnL w="3810" cap="flat" cmpd="sng" algn="ctr">
+                      <a:solidFill>
+                        <a:srgbClr val="D0D0D0"/>
+                      </a:solidFill>
+                      <a:prstDash val="solid"/>
+                      <a:round/>
+                      <a:headEnd type="none" w="med" len="med"/>
+                      <a:tailEnd type="none" w="med" len="med"/>
+                    </a:lnL>
+                    <a:lnR w="3810" cap="flat" cmpd="sng" algn="ctr">
+                      <a:solidFill>
+                        <a:srgbClr val="D0D0D0"/>
+                      </a:solidFill>
+                      <a:prstDash val="solid"/>
+                      <a:round/>
+                      <a:headEnd type="none" w="med" len="med"/>
+                      <a:tailEnd type="none" w="med" len="med"/>
+                    </a:lnR>
+                    <a:lnT w="3810" cap="flat" cmpd="sng" algn="ctr">
+                      <a:solidFill>
+                        <a:srgbClr val="D0D0D0"/>
+                      </a:solidFill>
+                      <a:prstDash val="solid"/>
+                      <a:round/>
+                      <a:headEnd type="none" w="med" len="med"/>
+                      <a:tailEnd type="none" w="med" len="med"/>
+                    </a:lnT>
+                    <a:lnB w="3810" cap="flat" cmpd="sng" algn="ctr">
+                      <a:solidFill>
+                        <a:srgbClr val="D0D0D0"/>
+                      </a:solidFill>
+                      <a:prstDash val="solid"/>
+                      <a:round/>
+                      <a:headEnd type="none" w="med" len="med"/>
+                      <a:tailEnd type="none" w="med" len="med"/>
+                    </a:lnB>
+                    <a:solidFill>
+                      <a:srgbClr val="F8F9FA"/>
+                    </a:solidFill>
+                  </a:tcPr>
+                </a:tc>
+                <a:tc>
+                  <a:txBody>
+                    <a:bodyPr/>
+                    <a:lstStyle/>
+                    <a:p>
+                      <a:pPr algn="r" indent="0" marL="0">
+                        <a:buNone/>
+                      </a:pPr>
+                      <a:r>
+                        <a:rPr lang="en-US" sz="850" dirty="0">
+                          <a:solidFill>
+                            <a:srgbClr val="2D3748"/>
+                          </a:solidFill>
+                          <a:latin typeface="Calibri" pitchFamily="34" charset="0"/>
+                          <a:ea typeface="Calibri" pitchFamily="34" charset="-122"/>
+                          <a:cs typeface="Calibri" pitchFamily="34" charset="-120"/>
+                        </a:rPr>
+                        <a:t>S/ 2,551,275</a:t>
+                      </a:r>
+                      <a:endParaRPr lang="en-US" sz="850" dirty="0">
+                        <a:latin typeface="Calibri" charset="0"/>
+                        <a:ea typeface="Calibri" charset="0"/>
+                        <a:cs typeface="Calibri" charset="0"/>
+                      </a:endParaRPr>
+                    </a:p>
+                  </a:txBody>
+                  <a:tcPr marL="91440" marR="91440" marT="45720" marB="45720">
+                    <a:lnL w="3810" cap="flat" cmpd="sng" algn="ctr">
+                      <a:solidFill>
+                        <a:srgbClr val="D0D0D0"/>
+                      </a:solidFill>
+                      <a:prstDash val="solid"/>
+                      <a:round/>
+                      <a:headEnd type="none" w="med" len="med"/>
+                      <a:tailEnd type="none" w="med" len="med"/>
+                    </a:lnL>
+                    <a:lnR w="3810" cap="flat" cmpd="sng" algn="ctr">
+                      <a:solidFill>
+                        <a:srgbClr val="D0D0D0"/>
+                      </a:solidFill>
+                      <a:prstDash val="solid"/>
+                      <a:round/>
+                      <a:headEnd type="none" w="med" len="med"/>
+                      <a:tailEnd type="none" w="med" len="med"/>
+                    </a:lnR>
+                    <a:lnT w="3810" cap="flat" cmpd="sng" algn="ctr">
+                      <a:solidFill>
+                        <a:srgbClr val="D0D0D0"/>
+                      </a:solidFill>
+                      <a:prstDash val="solid"/>
+                      <a:round/>
+                      <a:headEnd type="none" w="med" len="med"/>
+                      <a:tailEnd type="none" w="med" len="med"/>
+                    </a:lnT>
+                    <a:lnB w="3810" cap="flat" cmpd="sng" algn="ctr">
+                      <a:solidFill>
+                        <a:srgbClr val="D0D0D0"/>
+                      </a:solidFill>
+                      <a:prstDash val="solid"/>
+                      <a:round/>
+                      <a:headEnd type="none" w="med" len="med"/>
+                      <a:tailEnd type="none" w="med" len="med"/>
+                    </a:lnB>
+                    <a:solidFill>
+                      <a:srgbClr val="F8F9FA"/>
+                    </a:solidFill>
+                  </a:tcPr>
+                </a:tc>
+                <a:tc>
+                  <a:txBody>
+                    <a:bodyPr/>
+                    <a:lstStyle/>
+                    <a:p>
+                      <a:pPr algn="r" indent="0" marL="0">
+                        <a:buNone/>
+                      </a:pPr>
+                      <a:r>
+                        <a:rPr lang="en-US" sz="850" dirty="0">
+                          <a:solidFill>
+                            <a:srgbClr val="2D3748"/>
+                          </a:solidFill>
+                          <a:latin typeface="Calibri" pitchFamily="34" charset="0"/>
+                          <a:ea typeface="Calibri" pitchFamily="34" charset="-122"/>
+                          <a:cs typeface="Calibri" pitchFamily="34" charset="-120"/>
+                        </a:rPr>
+                        <a:t>11.0%</a:t>
+                      </a:r>
+                      <a:endParaRPr lang="en-US" sz="850" dirty="0">
+                        <a:latin typeface="Calibri" charset="0"/>
+                        <a:ea typeface="Calibri" charset="0"/>
+                        <a:cs typeface="Calibri" charset="0"/>
+                      </a:endParaRPr>
+                    </a:p>
+                  </a:txBody>
+                  <a:tcPr marL="91440" marR="91440" marT="45720" marB="45720">
+                    <a:lnL w="3810" cap="flat" cmpd="sng" algn="ctr">
+                      <a:solidFill>
+                        <a:srgbClr val="D0D0D0"/>
+                      </a:solidFill>
+                      <a:prstDash val="solid"/>
+                      <a:round/>
+                      <a:headEnd type="none" w="med" len="med"/>
+                      <a:tailEnd type="none" w="med" len="med"/>
+                    </a:lnL>
+                    <a:lnR w="3810" cap="flat" cmpd="sng" algn="ctr">
+                      <a:solidFill>
+                        <a:srgbClr val="D0D0D0"/>
+                      </a:solidFill>
+                      <a:prstDash val="solid"/>
+                      <a:round/>
+                      <a:headEnd type="none" w="med" len="med"/>
+                      <a:tailEnd type="none" w="med" len="med"/>
+                    </a:lnR>
+                    <a:lnT w="3810" cap="flat" cmpd="sng" algn="ctr">
+                      <a:solidFill>
+                        <a:srgbClr val="D0D0D0"/>
+                      </a:solidFill>
+                      <a:prstDash val="solid"/>
+                      <a:round/>
+                      <a:headEnd type="none" w="med" len="med"/>
+                      <a:tailEnd type="none" w="med" len="med"/>
+                    </a:lnT>
+                    <a:lnB w="3810" cap="flat" cmpd="sng" algn="ctr">
+                      <a:solidFill>
+                        <a:srgbClr val="D0D0D0"/>
+                      </a:solidFill>
+                      <a:prstDash val="solid"/>
+                      <a:round/>
+                      <a:headEnd type="none" w="med" len="med"/>
+                      <a:tailEnd type="none" w="med" len="med"/>
+                    </a:lnB>
+                    <a:solidFill>
+                      <a:srgbClr val="F8F9FA"/>
+                    </a:solidFill>
+                  </a:tcPr>
+                </a:tc>
+              </a:tr>
+              <a:tr h="0">
+                <a:tc>
+                  <a:txBody>
+                    <a:bodyPr/>
+                    <a:lstStyle/>
+                    <a:p>
+                      <a:pPr algn="l" indent="0" marL="0">
+                        <a:buNone/>
+                      </a:pPr>
+                      <a:r>
+                        <a:rPr lang="en-US" sz="850" dirty="0">
+                          <a:solidFill>
+                            <a:srgbClr val="2D3748"/>
+                          </a:solidFill>
+                          <a:latin typeface="Calibri" pitchFamily="34" charset="0"/>
+                          <a:ea typeface="Calibri" pitchFamily="34" charset="-122"/>
+                          <a:cs typeface="Calibri" pitchFamily="34" charset="-120"/>
+                        </a:rPr>
+                        <a:t>  Resultado del Ejercicio</a:t>
+                      </a:r>
+                      <a:endParaRPr lang="en-US" sz="850" dirty="0">
+                        <a:latin typeface="Calibri" charset="0"/>
+                        <a:ea typeface="Calibri" charset="0"/>
+                        <a:cs typeface="Calibri" charset="0"/>
+                      </a:endParaRPr>
+                    </a:p>
+                  </a:txBody>
+                  <a:tcPr marL="91440" marR="91440" marT="45720" marB="45720">
+                    <a:lnL w="3810" cap="flat" cmpd="sng" algn="ctr">
+                      <a:solidFill>
+                        <a:srgbClr val="D0D0D0"/>
+                      </a:solidFill>
+                      <a:prstDash val="solid"/>
+                      <a:round/>
+                      <a:headEnd type="none" w="med" len="med"/>
+                      <a:tailEnd type="none" w="med" len="med"/>
+                    </a:lnL>
+                    <a:lnR w="3810" cap="flat" cmpd="sng" algn="ctr">
+                      <a:solidFill>
+                        <a:srgbClr val="D0D0D0"/>
+                      </a:solidFill>
+                      <a:prstDash val="solid"/>
+                      <a:round/>
+                      <a:headEnd type="none" w="med" len="med"/>
+                      <a:tailEnd type="none" w="med" len="med"/>
+                    </a:lnR>
+                    <a:lnT w="3810" cap="flat" cmpd="sng" algn="ctr">
+                      <a:solidFill>
+                        <a:srgbClr val="D0D0D0"/>
+                      </a:solidFill>
+                      <a:prstDash val="solid"/>
+                      <a:round/>
+                      <a:headEnd type="none" w="med" len="med"/>
+                      <a:tailEnd type="none" w="med" len="med"/>
+                    </a:lnT>
+                    <a:lnB w="3810" cap="flat" cmpd="sng" algn="ctr">
+                      <a:solidFill>
+                        <a:srgbClr val="D0D0D0"/>
+                      </a:solidFill>
+                      <a:prstDash val="solid"/>
+                      <a:round/>
+                      <a:headEnd type="none" w="med" len="med"/>
+                      <a:tailEnd type="none" w="med" len="med"/>
+                    </a:lnB>
+                    <a:solidFill>
+                      <a:srgbClr val="FFFFFF"/>
+                    </a:solidFill>
+                  </a:tcPr>
+                </a:tc>
+                <a:tc>
+                  <a:txBody>
+                    <a:bodyPr/>
+                    <a:lstStyle/>
+                    <a:p>
+                      <a:pPr algn="r" indent="0" marL="0">
+                        <a:buNone/>
+                      </a:pPr>
+                      <a:r>
+                        <a:rPr lang="en-US" sz="850" dirty="0">
+                          <a:solidFill>
+                            <a:srgbClr val="2D3748"/>
+                          </a:solidFill>
+                          <a:latin typeface="Calibri" pitchFamily="34" charset="0"/>
+                          <a:ea typeface="Calibri" pitchFamily="34" charset="-122"/>
+                          <a:cs typeface="Calibri" pitchFamily="34" charset="-120"/>
+                        </a:rPr>
+                        <a:t>S/ 1,985,844</a:t>
+                      </a:r>
+                      <a:endParaRPr lang="en-US" sz="850" dirty="0">
+                        <a:latin typeface="Calibri" charset="0"/>
+                        <a:ea typeface="Calibri" charset="0"/>
+                        <a:cs typeface="Calibri" charset="0"/>
+                      </a:endParaRPr>
+                    </a:p>
+                  </a:txBody>
+                  <a:tcPr marL="91440" marR="91440" marT="45720" marB="45720">
+                    <a:lnL w="3810" cap="flat" cmpd="sng" algn="ctr">
+                      <a:solidFill>
+                        <a:srgbClr val="D0D0D0"/>
+                      </a:solidFill>
+                      <a:prstDash val="solid"/>
+                      <a:round/>
+                      <a:headEnd type="none" w="med" len="med"/>
+                      <a:tailEnd type="none" w="med" len="med"/>
+                    </a:lnL>
+                    <a:lnR w="3810" cap="flat" cmpd="sng" algn="ctr">
+                      <a:solidFill>
+                        <a:srgbClr val="D0D0D0"/>
+                      </a:solidFill>
+                      <a:prstDash val="solid"/>
+                      <a:round/>
+                      <a:headEnd type="none" w="med" len="med"/>
+                      <a:tailEnd type="none" w="med" len="med"/>
+                    </a:lnR>
+                    <a:lnT w="3810" cap="flat" cmpd="sng" algn="ctr">
+                      <a:solidFill>
+                        <a:srgbClr val="D0D0D0"/>
+                      </a:solidFill>
+                      <a:prstDash val="solid"/>
+                      <a:round/>
+                      <a:headEnd type="none" w="med" len="med"/>
+                      <a:tailEnd type="none" w="med" len="med"/>
+                    </a:lnT>
+                    <a:lnB w="3810" cap="flat" cmpd="sng" algn="ctr">
+                      <a:solidFill>
+                        <a:srgbClr val="D0D0D0"/>
+                      </a:solidFill>
+                      <a:prstDash val="solid"/>
+                      <a:round/>
+                      <a:headEnd type="none" w="med" len="med"/>
+                      <a:tailEnd type="none" w="med" len="med"/>
+                    </a:lnB>
+                    <a:solidFill>
+                      <a:srgbClr val="FFFFFF"/>
+                    </a:solidFill>
+                  </a:tcPr>
+                </a:tc>
+                <a:tc>
+                  <a:txBody>
+                    <a:bodyPr/>
+                    <a:lstStyle/>
+                    <a:p>
+                      <a:pPr algn="r" indent="0" marL="0">
+                        <a:buNone/>
+                      </a:pPr>
+                      <a:r>
+                        <a:rPr lang="en-US" sz="850" dirty="0">
+                          <a:solidFill>
+                            <a:srgbClr val="2D3748"/>
+                          </a:solidFill>
+                          <a:latin typeface="Calibri" pitchFamily="34" charset="0"/>
+                          <a:ea typeface="Calibri" pitchFamily="34" charset="-122"/>
+                          <a:cs typeface="Calibri" pitchFamily="34" charset="-120"/>
+                        </a:rPr>
+                        <a:t>8.5%</a:t>
+                      </a:r>
+                      <a:endParaRPr lang="en-US" sz="850" dirty="0">
+                        <a:latin typeface="Calibri" charset="0"/>
+                        <a:ea typeface="Calibri" charset="0"/>
+                        <a:cs typeface="Calibri" charset="0"/>
+                      </a:endParaRPr>
+                    </a:p>
+                  </a:txBody>
+                  <a:tcPr marL="91440" marR="91440" marT="45720" marB="45720">
+                    <a:lnL w="3810" cap="flat" cmpd="sng" algn="ctr">
+                      <a:solidFill>
+                        <a:srgbClr val="D0D0D0"/>
+                      </a:solidFill>
+                      <a:prstDash val="solid"/>
+                      <a:round/>
+                      <a:headEnd type="none" w="med" len="med"/>
+                      <a:tailEnd type="none" w="med" len="med"/>
+                    </a:lnL>
+                    <a:lnR w="3810" cap="flat" cmpd="sng" algn="ctr">
+                      <a:solidFill>
+                        <a:srgbClr val="D0D0D0"/>
+                      </a:solidFill>
+                      <a:prstDash val="solid"/>
+                      <a:round/>
+                      <a:headEnd type="none" w="med" len="med"/>
+                      <a:tailEnd type="none" w="med" len="med"/>
+                    </a:lnR>
+                    <a:lnT w="3810" cap="flat" cmpd="sng" algn="ctr">
+                      <a:solidFill>
+                        <a:srgbClr val="D0D0D0"/>
+                      </a:solidFill>
+                      <a:prstDash val="solid"/>
+                      <a:round/>
+                      <a:headEnd type="none" w="med" len="med"/>
+                      <a:tailEnd type="none" w="med" len="med"/>
+                    </a:lnT>
+                    <a:lnB w="3810" cap="flat" cmpd="sng" algn="ctr">
+                      <a:solidFill>
+                        <a:srgbClr val="D0D0D0"/>
+                      </a:solidFill>
+                      <a:prstDash val="solid"/>
+                      <a:round/>
+                      <a:headEnd type="none" w="med" len="med"/>
+                      <a:tailEnd type="none" w="med" len="med"/>
+                    </a:lnB>
+                    <a:solidFill>
+                      <a:srgbClr val="FFFFFF"/>
+                    </a:solidFill>
+                  </a:tcPr>
+                </a:tc>
+              </a:tr>
+              <a:tr h="0">
+                <a:tc>
+                  <a:txBody>
+                    <a:bodyPr/>
+                    <a:lstStyle/>
+                    <a:p>
+                      <a:pPr algn="l" indent="0" marL="0">
+                        <a:buNone/>
+                      </a:pPr>
+                      <a:r>
                         <a:rPr lang="en-US" sz="850" b="1" dirty="0">
                           <a:solidFill>
                             <a:srgbClr val="FFFFFF"/>
@@ -12119,7 +14797,7 @@
                           <a:ea typeface="Calibri" pitchFamily="34" charset="-122"/>
                           <a:cs typeface="Calibri" pitchFamily="34" charset="-120"/>
                         </a:rPr>
-                        <a:t>NaN%</a:t>
+                        <a:t>32.4%</a:t>
                       </a:r>
                       <a:endParaRPr lang="en-US" sz="850" dirty="0">
                         <a:latin typeface="Calibri" charset="0"/>
@@ -12257,7 +14935,7 @@
                           <a:ea typeface="Calibri" pitchFamily="34" charset="-122"/>
                           <a:cs typeface="Calibri" pitchFamily="34" charset="-120"/>
                         </a:rPr>
-                        <a:t>S/ -</a:t>
+                        <a:t>S/ 23,255,000</a:t>
                       </a:r>
                       <a:endParaRPr lang="en-US" sz="850" dirty="0">
                         <a:latin typeface="Calibri" charset="0"/>
@@ -12460,7 +15138,7 @@
                 <a:ea typeface="Calibri" pitchFamily="34" charset="-122"/>
                 <a:cs typeface="Calibri" pitchFamily="34" charset="-120"/>
               </a:rPr>
-              <a:t>CxP comerciales S/ 0 — periodo de pago 0 días.</a:t>
+              <a:t>CxP comerciales S/ 9,780,000 — periodo de pago 0 días.</a:t>
             </a:r>
             <a:endParaRPr lang="en-US" sz="850" dirty="0"/>
           </a:p>
@@ -17758,7 +20436,7 @@
         <p:spPr>
           <a:xfrm>
             <a:off x="879994" y="1965960"/>
-            <a:ext cx="1135956" cy="457200"/>
+            <a:ext cx="905191" cy="457200"/>
           </a:xfrm>
           <a:prstGeom prst="rect">
             <a:avLst/>
@@ -17772,6 +20450,46 @@
       <p:sp>
         <p:nvSpPr>
           <p:cNvPr id="9" name="Shape 7"/>
+          <p:cNvSpPr/>
+          <p:nvPr/>
+        </p:nvSpPr>
+        <p:spPr>
+          <a:xfrm>
+            <a:off x="1785186" y="1965960"/>
+            <a:ext cx="628500" cy="457200"/>
+          </a:xfrm>
+          <a:prstGeom prst="rect">
+            <a:avLst/>
+          </a:prstGeom>
+          <a:solidFill>
+            <a:srgbClr val="4CAF50"/>
+          </a:solidFill>
+          <a:ln/>
+        </p:spPr>
+      </p:sp>
+      <p:sp>
+        <p:nvSpPr>
+          <p:cNvPr id="10" name="Shape 8"/>
+          <p:cNvSpPr/>
+          <p:nvPr/>
+        </p:nvSpPr>
+        <p:spPr>
+          <a:xfrm>
+            <a:off x="2413686" y="1965960"/>
+            <a:ext cx="1135956" cy="457200"/>
+          </a:xfrm>
+          <a:prstGeom prst="rect">
+            <a:avLst/>
+          </a:prstGeom>
+          <a:solidFill>
+            <a:srgbClr val="FFC107"/>
+          </a:solidFill>
+          <a:ln/>
+        </p:spPr>
+      </p:sp>
+      <p:sp>
+        <p:nvSpPr>
+          <p:cNvPr id="11" name="Shape 9"/>
           <p:cNvSpPr/>
           <p:nvPr/>
         </p:nvSpPr>
@@ -17791,7 +20509,7 @@
       </p:sp>
       <p:sp>
         <p:nvSpPr>
-          <p:cNvPr id="10" name="Text 8"/>
+          <p:cNvPr id="12" name="Text 10"/>
           <p:cNvSpPr/>
           <p:nvPr/>
         </p:nvSpPr>
@@ -17830,7 +20548,7 @@
       </p:sp>
       <p:sp>
         <p:nvSpPr>
-          <p:cNvPr id="11" name="Shape 9"/>
+          <p:cNvPr id="13" name="Shape 11"/>
           <p:cNvSpPr/>
           <p:nvPr/>
         </p:nvSpPr>
@@ -17850,13 +20568,131 @@
       </p:sp>
       <p:sp>
         <p:nvSpPr>
-          <p:cNvPr id="12" name="Text 10"/>
+          <p:cNvPr id="14" name="Text 12"/>
           <p:cNvSpPr/>
           <p:nvPr/>
         </p:nvSpPr>
         <p:spPr>
           <a:xfrm>
             <a:off x="1005840" y="2862072"/>
+            <a:ext cx="2560320" cy="228600"/>
+          </a:xfrm>
+          <a:prstGeom prst="rect">
+            <a:avLst/>
+          </a:prstGeom>
+          <a:noFill/>
+          <a:ln/>
+        </p:spPr>
+        <p:txBody>
+          <a:bodyPr wrap="square" rtlCol="0" anchor="ctr"/>
+          <a:lstStyle/>
+          <a:p>
+            <a:pPr indent="0" marL="0">
+              <a:buNone/>
+            </a:pPr>
+            <a:r>
+              <a:rPr lang="en-US" sz="700" dirty="0">
+                <a:solidFill>
+                  <a:srgbClr val="2D3748"/>
+                </a:solidFill>
+                <a:latin typeface="Calibri" pitchFamily="34" charset="0"/>
+                <a:ea typeface="Calibri" pitchFamily="34" charset="-122"/>
+                <a:cs typeface="Calibri" pitchFamily="34" charset="-120"/>
+              </a:rPr>
+              <a:t>CxC: S/ 7,194,000 (30.9%)</a:t>
+            </a:r>
+            <a:endParaRPr lang="en-US" sz="700" dirty="0"/>
+          </a:p>
+        </p:txBody>
+      </p:sp>
+      <p:sp>
+        <p:nvSpPr>
+          <p:cNvPr id="15" name="Shape 13"/>
+          <p:cNvSpPr/>
+          <p:nvPr/>
+        </p:nvSpPr>
+        <p:spPr>
+          <a:xfrm>
+            <a:off x="731520" y="3154680"/>
+            <a:ext cx="182880" cy="182880"/>
+          </a:xfrm>
+          <a:prstGeom prst="rect">
+            <a:avLst/>
+          </a:prstGeom>
+          <a:solidFill>
+            <a:srgbClr val="4CAF50"/>
+          </a:solidFill>
+          <a:ln/>
+        </p:spPr>
+      </p:sp>
+      <p:sp>
+        <p:nvSpPr>
+          <p:cNvPr id="16" name="Text 14"/>
+          <p:cNvSpPr/>
+          <p:nvPr/>
+        </p:nvSpPr>
+        <p:spPr>
+          <a:xfrm>
+            <a:off x="1005840" y="3136392"/>
+            <a:ext cx="2560320" cy="228600"/>
+          </a:xfrm>
+          <a:prstGeom prst="rect">
+            <a:avLst/>
+          </a:prstGeom>
+          <a:noFill/>
+          <a:ln/>
+        </p:spPr>
+        <p:txBody>
+          <a:bodyPr wrap="square" rtlCol="0" anchor="ctr"/>
+          <a:lstStyle/>
+          <a:p>
+            <a:pPr indent="0" marL="0">
+              <a:buNone/>
+            </a:pPr>
+            <a:r>
+              <a:rPr lang="en-US" sz="700" dirty="0">
+                <a:solidFill>
+                  <a:srgbClr val="2D3748"/>
+                </a:solidFill>
+                <a:latin typeface="Calibri" pitchFamily="34" charset="0"/>
+                <a:ea typeface="Calibri" pitchFamily="34" charset="-122"/>
+                <a:cs typeface="Calibri" pitchFamily="34" charset="-120"/>
+              </a:rPr>
+              <a:t>Inventarios: S/ 4,995,000 (21.5%)</a:t>
+            </a:r>
+            <a:endParaRPr lang="en-US" sz="700" dirty="0"/>
+          </a:p>
+        </p:txBody>
+      </p:sp>
+      <p:sp>
+        <p:nvSpPr>
+          <p:cNvPr id="17" name="Shape 15"/>
+          <p:cNvSpPr/>
+          <p:nvPr/>
+        </p:nvSpPr>
+        <p:spPr>
+          <a:xfrm>
+            <a:off x="731520" y="3429000"/>
+            <a:ext cx="182880" cy="182880"/>
+          </a:xfrm>
+          <a:prstGeom prst="rect">
+            <a:avLst/>
+          </a:prstGeom>
+          <a:solidFill>
+            <a:srgbClr val="FFC107"/>
+          </a:solidFill>
+          <a:ln/>
+        </p:spPr>
+      </p:sp>
+      <p:sp>
+        <p:nvSpPr>
+          <p:cNvPr id="18" name="Text 16"/>
+          <p:cNvSpPr/>
+          <p:nvPr/>
+        </p:nvSpPr>
+        <p:spPr>
+          <a:xfrm>
+            <a:off x="1005840" y="3410712"/>
             <a:ext cx="2560320" cy="228600"/>
           </a:xfrm>
           <a:prstGeom prst="rect">
@@ -17889,7 +20725,7 @@
       </p:sp>
       <p:sp>
         <p:nvSpPr>
-          <p:cNvPr id="13" name="Text 11"/>
+          <p:cNvPr id="19" name="Text 17"/>
           <p:cNvSpPr/>
           <p:nvPr/>
         </p:nvSpPr>
@@ -17928,14 +20764,14 @@
       </p:sp>
       <p:sp>
         <p:nvSpPr>
-          <p:cNvPr id="14" name="Shape 12"/>
+          <p:cNvPr id="20" name="Shape 18"/>
           <p:cNvSpPr/>
           <p:nvPr/>
         </p:nvSpPr>
         <p:spPr>
           <a:xfrm>
             <a:off x="4572000" y="1965960"/>
-            <a:ext cx="1564644" cy="457200"/>
+            <a:ext cx="1230577" cy="457200"/>
           </a:xfrm>
           <a:prstGeom prst="rect">
             <a:avLst/>
@@ -17948,7 +20784,27 @@
       </p:sp>
       <p:sp>
         <p:nvSpPr>
-          <p:cNvPr id="15" name="Shape 13"/>
+          <p:cNvPr id="21" name="Shape 19"/>
+          <p:cNvSpPr/>
+          <p:nvPr/>
+        </p:nvSpPr>
+        <p:spPr>
+          <a:xfrm>
+            <a:off x="5802577" y="1965960"/>
+            <a:ext cx="334068" cy="457200"/>
+          </a:xfrm>
+          <a:prstGeom prst="rect">
+            <a:avLst/>
+          </a:prstGeom>
+          <a:solidFill>
+            <a:srgbClr val="F39C12"/>
+          </a:solidFill>
+          <a:ln/>
+        </p:spPr>
+      </p:sp>
+      <p:sp>
+        <p:nvSpPr>
+          <p:cNvPr id="22" name="Shape 20"/>
           <p:cNvSpPr/>
           <p:nvPr/>
         </p:nvSpPr>
@@ -17961,14 +20817,14 @@
             <a:avLst/>
           </a:prstGeom>
           <a:solidFill>
-            <a:srgbClr val="F39C12"/>
+            <a:srgbClr val="CC0000"/>
           </a:solidFill>
           <a:ln/>
         </p:spPr>
       </p:sp>
       <p:sp>
         <p:nvSpPr>
-          <p:cNvPr id="16" name="Shape 14"/>
+          <p:cNvPr id="23" name="Shape 21"/>
           <p:cNvSpPr/>
           <p:nvPr/>
         </p:nvSpPr>
@@ -17981,14 +20837,14 @@
             <a:avLst/>
           </a:prstGeom>
           <a:solidFill>
-            <a:srgbClr val="CC0000"/>
+            <a:srgbClr val="FFC107"/>
           </a:solidFill>
           <a:ln/>
         </p:spPr>
       </p:sp>
       <p:sp>
         <p:nvSpPr>
-          <p:cNvPr id="17" name="Shape 15"/>
+          <p:cNvPr id="24" name="Shape 22"/>
           <p:cNvSpPr/>
           <p:nvPr/>
         </p:nvSpPr>
@@ -18008,7 +20864,7 @@
       </p:sp>
       <p:sp>
         <p:nvSpPr>
-          <p:cNvPr id="18" name="Text 16"/>
+          <p:cNvPr id="25" name="Text 23"/>
           <p:cNvSpPr/>
           <p:nvPr/>
         </p:nvSpPr>
@@ -18039,7 +20895,7 @@
                 <a:ea typeface="Calibri" pitchFamily="34" charset="-122"/>
                 <a:cs typeface="Calibri" pitchFamily="34" charset="-120"/>
               </a:rPr>
-              <a:t>Otros PC: S/ 12,435,000 (53.5%)</a:t>
+              <a:t>CxP Comerciales: S/ 9,780,000 (42.1%)</a:t>
             </a:r>
             <a:endParaRPr lang="en-US" sz="700" dirty="0"/>
           </a:p>
@@ -18047,7 +20903,7 @@
       </p:sp>
       <p:sp>
         <p:nvSpPr>
-          <p:cNvPr id="19" name="Shape 17"/>
+          <p:cNvPr id="26" name="Shape 24"/>
           <p:cNvSpPr/>
           <p:nvPr/>
         </p:nvSpPr>
@@ -18067,13 +20923,72 @@
       </p:sp>
       <p:sp>
         <p:nvSpPr>
-          <p:cNvPr id="20" name="Text 18"/>
+          <p:cNvPr id="27" name="Text 25"/>
           <p:cNvSpPr/>
           <p:nvPr/>
         </p:nvSpPr>
         <p:spPr>
           <a:xfrm>
             <a:off x="4846320" y="2862072"/>
+            <a:ext cx="2560320" cy="228600"/>
+          </a:xfrm>
+          <a:prstGeom prst="rect">
+            <a:avLst/>
+          </a:prstGeom>
+          <a:noFill/>
+          <a:ln/>
+        </p:spPr>
+        <p:txBody>
+          <a:bodyPr wrap="square" rtlCol="0" anchor="ctr"/>
+          <a:lstStyle/>
+          <a:p>
+            <a:pPr indent="0" marL="0">
+              <a:buNone/>
+            </a:pPr>
+            <a:r>
+              <a:rPr lang="en-US" sz="700" dirty="0">
+                <a:solidFill>
+                  <a:srgbClr val="2D3748"/>
+                </a:solidFill>
+                <a:latin typeface="Calibri" pitchFamily="34" charset="0"/>
+                <a:ea typeface="Calibri" pitchFamily="34" charset="-122"/>
+                <a:cs typeface="Calibri" pitchFamily="34" charset="-120"/>
+              </a:rPr>
+              <a:t>Otros PC: S/ 2,655,000 (11.4%)</a:t>
+            </a:r>
+            <a:endParaRPr lang="en-US" sz="700" dirty="0"/>
+          </a:p>
+        </p:txBody>
+      </p:sp>
+      <p:sp>
+        <p:nvSpPr>
+          <p:cNvPr id="28" name="Shape 26"/>
+          <p:cNvSpPr/>
+          <p:nvPr/>
+        </p:nvSpPr>
+        <p:spPr>
+          <a:xfrm>
+            <a:off x="4572000" y="3154680"/>
+            <a:ext cx="182880" cy="182880"/>
+          </a:xfrm>
+          <a:prstGeom prst="rect">
+            <a:avLst/>
+          </a:prstGeom>
+          <a:solidFill>
+            <a:srgbClr val="CC0000"/>
+          </a:solidFill>
+          <a:ln/>
+        </p:spPr>
+      </p:sp>
+      <p:sp>
+        <p:nvSpPr>
+          <p:cNvPr id="29" name="Text 27"/>
+          <p:cNvSpPr/>
+          <p:nvPr/>
+        </p:nvSpPr>
+        <p:spPr>
+          <a:xfrm>
+            <a:off x="4846320" y="3136392"/>
             <a:ext cx="2560320" cy="228600"/>
           </a:xfrm>
           <a:prstGeom prst="rect">
@@ -18106,33 +21021,33 @@
       </p:sp>
       <p:sp>
         <p:nvSpPr>
-          <p:cNvPr id="21" name="Shape 19"/>
+          <p:cNvPr id="30" name="Shape 28"/>
           <p:cNvSpPr/>
           <p:nvPr/>
         </p:nvSpPr>
         <p:spPr>
           <a:xfrm>
-            <a:off x="4572000" y="3154680"/>
+            <a:off x="4572000" y="3429000"/>
             <a:ext cx="182880" cy="182880"/>
           </a:xfrm>
           <a:prstGeom prst="rect">
             <a:avLst/>
           </a:prstGeom>
           <a:solidFill>
-            <a:srgbClr val="CC0000"/>
+            <a:srgbClr val="FFC107"/>
           </a:solidFill>
           <a:ln/>
         </p:spPr>
       </p:sp>
       <p:sp>
         <p:nvSpPr>
-          <p:cNvPr id="22" name="Text 20"/>
+          <p:cNvPr id="31" name="Text 29"/>
           <p:cNvSpPr/>
           <p:nvPr/>
         </p:nvSpPr>
         <p:spPr>
           <a:xfrm>
-            <a:off x="4846320" y="3136392"/>
+            <a:off x="4846320" y="3410712"/>
             <a:ext cx="2560320" cy="228600"/>
           </a:xfrm>
           <a:prstGeom prst="rect">
@@ -18165,7 +21080,7 @@
       </p:sp>
       <p:sp>
         <p:nvSpPr>
-          <p:cNvPr id="23" name="Shape 21"/>
+          <p:cNvPr id="32" name="Shape 30"/>
           <p:cNvSpPr/>
           <p:nvPr/>
         </p:nvSpPr>
@@ -18192,7 +21107,7 @@
       </p:sp>
       <p:sp>
         <p:nvSpPr>
-          <p:cNvPr id="24" name="Text 22"/>
+          <p:cNvPr id="33" name="Text 31"/>
           <p:cNvSpPr/>
           <p:nvPr/>
         </p:nvSpPr>
@@ -18231,7 +21146,7 @@
       </p:sp>
       <p:sp>
         <p:nvSpPr>
-          <p:cNvPr id="25" name="Text 23"/>
+          <p:cNvPr id="34" name="Text 32"/>
           <p:cNvSpPr/>
           <p:nvPr/>
         </p:nvSpPr>
@@ -18315,7 +21230,7 @@
       </p:sp>
       <p:sp>
         <p:nvSpPr>
-          <p:cNvPr id="26" name="Shape 24"/>
+          <p:cNvPr id="35" name="Shape 33"/>
           <p:cNvSpPr/>
           <p:nvPr/>
         </p:nvSpPr>
@@ -18335,7 +21250,7 @@
       </p:sp>
       <p:sp>
         <p:nvSpPr>
-          <p:cNvPr id="27" name="Text 25"/>
+          <p:cNvPr id="36" name="Text 34"/>
           <p:cNvSpPr/>
           <p:nvPr/>
         </p:nvSpPr>
@@ -18374,7 +21289,7 @@
       </p:sp>
       <p:sp>
         <p:nvSpPr>
-          <p:cNvPr id="28" name="Text 26"/>
+          <p:cNvPr id="37" name="Text 35"/>
           <p:cNvSpPr/>
           <p:nvPr/>
         </p:nvSpPr>
